--- a/docs/pitch/transit-pulse-pitch.pptx
+++ b/docs/pitch/transit-pulse-pitch.pptx
@@ -1216,7 +1216,7 @@
           <a:p>
             <a:r>
               <a:rPr lang="en-US" dirty="0"/>
-              <a:t>[~20 с] Алерт — не просто «опоздает». SHAP-вклады превращаются в причину из справочника с доказательствами в цифрах, к ней — одна-три рекомендации с кнопкой «Принять». What-if показывает эффект меры до её применения: здесь резервный выпуск переводит инцидент из красного в жёлтый, вероятность опоздания падает с 58 до 37 процентов.</a:t>
+              <a:t>[~20 с] Алерт — не просто «опоздает». SHAP-вклады превращаются в причину из справочника с доказательствами в цифрах, к ней — одна-три рекомендации с кнопкой «Принять». What-if показывает эффект меры до её применения: здесь резервный выпуск переводит цель из жёлтого в зелёный, вероятность опоздания падает с 36 до 28 процентов.</a:t>
             </a:r>
             <a:endParaRPr lang="en-US" dirty="0"/>
           </a:p>
@@ -1304,7 +1304,7 @@
           <a:p>
             <a:r>
               <a:rPr lang="en-US" dirty="0"/>
-              <a:t>[~25 с] Инференс — полторы миллисекунды на батч из 30 машин, путь от пакета NDTP до дашборда — меньше полсекунды. 300 TCP-соединений, 757 пакетов в секунду, ноль потерь. Оборвался поток — режим DEGRADED и работа по последнему состоянию; упал ML — эвристика; перезапустили backend — борта переподключаются сами. Холодный старт — 17 с половиной секунд.</a:t>
+              <a:t>[~25 с] Инференс — полторы миллисекунды на батч из 30 машин; от пакета NDTP до дашборда — меньше секунды по p95. Под нагрузкой — 300 TCP-соединений и ноль потерь. Справа — панель «Система» прямо из дашборда: ноль потерь, ноль ошибок CRC, все алерты — за 10 минут и раньше. Оборвался поток — DEGRADED; упал ML — эвристика; рестарт backend — борта переподключаются сами. Холодный старт — 17 с половиной секунд.</a:t>
             </a:r>
             <a:endParaRPr lang="en-US" dirty="0"/>
           </a:p>
@@ -1392,7 +1392,7 @@
           <a:p>
             <a:r>
               <a:rPr lang="en-US" dirty="0"/>
-              <a:t>[~15 с] Все дополнительные фичи из ТЗ сделаны: map-matching с учётом специфики NDTP — в 1.9 раза точнее, what-if, ONNX, ансамбль CatBoost и PyTorch GRU. Плюс собственный NDTP-кодек, байт-в-байт как официальный эмулятор, и больше двухсот автотестов.</a:t>
+              <a:t>[~15 с] Все дополнительные фичи из ТЗ сделаны: map-matching с учётом специфики NDTP — в 1.9 раза точнее, what-if, ONNX, ансамбль CatBoost и PyTorch GRU. Плюс собственный NDTP-кодек, байт-в-байт как официальный эмулятор, больше двухсот автотестов, а в дашборде — drawer ТС с графиком отклонения и панель «Система».</a:t>
             </a:r>
             <a:endParaRPr lang="en-US" dirty="0"/>
           </a:p>
@@ -9489,11 +9489,11 @@
         <p:spPr>
           <a:xfrm>
             <a:off x="512064" y="1883664"/>
-            <a:ext cx="2741908" cy="4416552"/>
+            <a:ext cx="2503026" cy="4416552"/>
           </a:xfrm>
           <a:prstGeom prst="roundRect">
             <a:avLst>
-              <a:gd name="adj" fmla="val 2001"/>
+              <a:gd name="adj" fmla="val 2192"/>
             </a:avLst>
           </a:prstGeom>
           <a:solidFill>
@@ -9526,7 +9526,7 @@
         <p:spPr>
           <a:xfrm>
             <a:off x="548640" y="1920240"/>
-            <a:ext cx="2668756" cy="4343400"/>
+            <a:ext cx="2429874" cy="4343400"/>
           </a:xfrm>
           <a:prstGeom prst="rect">
             <a:avLst/>
@@ -9542,11 +9542,11 @@
         <p:spPr>
           <a:xfrm>
             <a:off x="7765999" y="1883664"/>
-            <a:ext cx="3913632" cy="2809494"/>
+            <a:ext cx="3913632" cy="2751887"/>
           </a:xfrm>
           <a:prstGeom prst="roundRect">
             <a:avLst>
-              <a:gd name="adj" fmla="val 1953"/>
+              <a:gd name="adj" fmla="val 1994"/>
             </a:avLst>
           </a:prstGeom>
           <a:solidFill>
@@ -9579,7 +9579,7 @@
         <p:spPr>
           <a:xfrm>
             <a:off x="7802575" y="1920240"/>
-            <a:ext cx="3840480" cy="2736342"/>
+            <a:ext cx="3840480" cy="2678735"/>
           </a:xfrm>
           <a:prstGeom prst="rect">
             <a:avLst/>
@@ -9594,7 +9594,7 @@
         </p:nvSpPr>
         <p:spPr>
           <a:xfrm>
-            <a:off x="3628876" y="2066544"/>
+            <a:off x="3389994" y="2066544"/>
             <a:ext cx="182880" cy="182880"/>
           </a:xfrm>
           <a:prstGeom prst="triangle">
@@ -9614,8 +9614,8 @@
         </p:nvSpPr>
         <p:spPr>
           <a:xfrm>
-            <a:off x="3948916" y="2011680"/>
-            <a:ext cx="3442179" cy="320040"/>
+            <a:off x="3710034" y="2011680"/>
+            <a:ext cx="3681061" cy="320040"/>
           </a:xfrm>
           <a:prstGeom prst="rect">
             <a:avLst/>
@@ -9653,8 +9653,8 @@
         </p:nvSpPr>
         <p:spPr>
           <a:xfrm>
-            <a:off x="3948916" y="2377440"/>
-            <a:ext cx="3442179" cy="914400"/>
+            <a:off x="3710034" y="2377440"/>
+            <a:ext cx="3681061" cy="914400"/>
           </a:xfrm>
           <a:prstGeom prst="rect">
             <a:avLst/>
@@ -9692,7 +9692,7 @@
         </p:nvSpPr>
         <p:spPr>
           <a:xfrm>
-            <a:off x="3628876" y="3483864"/>
+            <a:off x="3389994" y="3483864"/>
             <a:ext cx="182880" cy="182880"/>
           </a:xfrm>
           <a:prstGeom prst="diamond">
@@ -9712,8 +9712,8 @@
         </p:nvSpPr>
         <p:spPr>
           <a:xfrm>
-            <a:off x="3948916" y="3429000"/>
-            <a:ext cx="3442179" cy="320040"/>
+            <a:off x="3710034" y="3429000"/>
+            <a:ext cx="3681061" cy="320040"/>
           </a:xfrm>
           <a:prstGeom prst="rect">
             <a:avLst/>
@@ -9751,8 +9751,8 @@
         </p:nvSpPr>
         <p:spPr>
           <a:xfrm>
-            <a:off x="3948916" y="3794760"/>
-            <a:ext cx="3442179" cy="914400"/>
+            <a:off x="3710034" y="3794760"/>
+            <a:ext cx="3681061" cy="914400"/>
           </a:xfrm>
           <a:prstGeom prst="rect">
             <a:avLst/>
@@ -9790,7 +9790,7 @@
         </p:nvSpPr>
         <p:spPr>
           <a:xfrm>
-            <a:off x="3628876" y="4901184"/>
+            <a:off x="3389994" y="4901184"/>
             <a:ext cx="182880" cy="182880"/>
           </a:xfrm>
           <a:prstGeom prst="ellipse">
@@ -9810,8 +9810,8 @@
         </p:nvSpPr>
         <p:spPr>
           <a:xfrm>
-            <a:off x="3948916" y="4846320"/>
-            <a:ext cx="3442179" cy="320040"/>
+            <a:off x="3710034" y="4846320"/>
+            <a:ext cx="3681061" cy="320040"/>
           </a:xfrm>
           <a:prstGeom prst="rect">
             <a:avLst/>
@@ -9849,8 +9849,8 @@
         </p:nvSpPr>
         <p:spPr>
           <a:xfrm>
-            <a:off x="3948916" y="5212080"/>
-            <a:ext cx="3442179" cy="914400"/>
+            <a:off x="3710034" y="5212080"/>
+            <a:ext cx="3681061" cy="914400"/>
           </a:xfrm>
           <a:prstGeom prst="rect">
             <a:avLst/>
@@ -9888,7 +9888,7 @@
         </p:nvSpPr>
         <p:spPr>
           <a:xfrm>
-            <a:off x="7802575" y="4885182"/>
+            <a:off x="7802575" y="4827575"/>
             <a:ext cx="3840480" cy="822960"/>
           </a:xfrm>
           <a:prstGeom prst="rect">
@@ -10104,32 +10104,122 @@
       </p:sp>
       <p:sp>
         <p:nvSpPr>
-          <p:cNvPr id="6" name="Text 4"/>
-          <p:cNvSpPr txBox="1"/>
-          <p:nvPr/>
-        </p:nvSpPr>
-        <p:spPr>
-          <a:xfrm>
-            <a:off x="548640" y="2103120"/>
-            <a:ext cx="2567864" cy="868680"/>
-          </a:xfrm>
-          <a:prstGeom prst="rect">
-            <a:avLst/>
-          </a:prstGeom>
-          <a:noFill/>
-          <a:ln/>
-        </p:spPr>
-        <p:txBody>
-          <a:bodyPr wrap="square" lIns="0" tIns="0" rIns="0" bIns="0" rtlCol="0" anchor="t">
-            <a:normAutofit/>
-          </a:bodyPr>
-          <a:lstStyle/>
-          <a:p>
-            <a:pPr indent="0" marL="0">
-              <a:buNone/>
-            </a:pPr>
-            <a:r>
-              <a:rPr lang="en-US" sz="4200" b="1" dirty="0">
+          <p:cNvPr id="6" name="Shape 4"/>
+          <p:cNvSpPr/>
+          <p:nvPr/>
+        </p:nvSpPr>
+        <p:spPr>
+          <a:xfrm>
+            <a:off x="5479999" y="1883664"/>
+            <a:ext cx="6199632" cy="3542740"/>
+          </a:xfrm>
+          <a:prstGeom prst="roundRect">
+            <a:avLst>
+              <a:gd name="adj" fmla="val 1549"/>
+            </a:avLst>
+          </a:prstGeom>
+          <a:solidFill>
+            <a:srgbClr val="2A3342"/>
+          </a:solidFill>
+          <a:ln/>
+          <a:effectLst>
+            <a:outerShdw sx="100000" sy="100000" kx="0" ky="0" algn="bl" rotWithShape="0" blurRad="228600" dist="76200" dir="5400000">
+              <a:srgbClr val="000000">
+                <a:alpha val="45000"/>
+              </a:srgbClr>
+            </a:outerShdw>
+          </a:effectLst>
+        </p:spPr>
+      </p:sp>
+      <p:pic>
+        <p:nvPicPr>
+          <p:cNvPr id="7" name="Image 0" descr="/home/jinx/Desktop/transit-pulse/.claude/worktrees/agent-a1ec232645154e152/docs/pitch/img/system.jpg">    </p:cNvPr>
+          <p:cNvPicPr>
+            <a:picLocks noChangeAspect="1"/>
+          </p:cNvPicPr>
+          <p:nvPr/>
+        </p:nvPicPr>
+        <p:blipFill>
+          <a:blip r:embed="rId1"/>
+          <a:stretch>
+            <a:fillRect/>
+          </a:stretch>
+        </p:blipFill>
+        <p:spPr>
+          <a:xfrm>
+            <a:off x="5516575" y="1920240"/>
+            <a:ext cx="6126480" cy="3469588"/>
+          </a:xfrm>
+          <a:prstGeom prst="rect">
+            <a:avLst/>
+          </a:prstGeom>
+        </p:spPr>
+      </p:pic>
+      <p:sp>
+        <p:nvSpPr>
+          <p:cNvPr id="8" name="Text 5"/>
+          <p:cNvSpPr txBox="1"/>
+          <p:nvPr/>
+        </p:nvSpPr>
+        <p:spPr>
+          <a:xfrm>
+            <a:off x="5516575" y="5499556"/>
+            <a:ext cx="6126480" cy="274320"/>
+          </a:xfrm>
+          <a:prstGeom prst="rect">
+            <a:avLst/>
+          </a:prstGeom>
+          <a:noFill/>
+          <a:ln/>
+        </p:spPr>
+        <p:txBody>
+          <a:bodyPr wrap="square" lIns="0" tIns="0" rIns="0" bIns="0" rtlCol="0" anchor="t"/>
+          <a:lstStyle/>
+          <a:p>
+            <a:pPr indent="0" marL="0">
+              <a:buNone/>
+            </a:pPr>
+            <a:r>
+              <a:rPr lang="en-US" sz="1000" dirty="0">
+                <a:solidFill>
+                  <a:srgbClr val="5B6472"/>
+                </a:solidFill>
+                <a:latin typeface="IBM Plex Sans" pitchFamily="34" charset="0"/>
+                <a:ea typeface="IBM Plex Sans" pitchFamily="34" charset="-122"/>
+                <a:cs typeface="IBM Plex Sans" pitchFamily="34" charset="-120"/>
+              </a:rPr>
+              <a:t>Панель «Система» на живом стеке: 0 потерь, 0 ошибок CRC, 100% алертов за ≥ 10 мин</a:t>
+            </a:r>
+            <a:endParaRPr lang="en-US" sz="1000" dirty="0"/>
+          </a:p>
+        </p:txBody>
+      </p:sp>
+      <p:sp>
+        <p:nvSpPr>
+          <p:cNvPr id="9" name="Text 6"/>
+          <p:cNvSpPr txBox="1"/>
+          <p:nvPr/>
+        </p:nvSpPr>
+        <p:spPr>
+          <a:xfrm>
+            <a:off x="548640" y="1920240"/>
+            <a:ext cx="2141068" cy="685800"/>
+          </a:xfrm>
+          <a:prstGeom prst="rect">
+            <a:avLst/>
+          </a:prstGeom>
+          <a:noFill/>
+          <a:ln/>
+        </p:spPr>
+        <p:txBody>
+          <a:bodyPr wrap="square" lIns="0" tIns="0" rIns="0" bIns="0" rtlCol="0" anchor="t"/>
+          <a:lstStyle/>
+          <a:p>
+            <a:pPr indent="0" marL="0">
+              <a:buNone/>
+            </a:pPr>
+            <a:r>
+              <a:rPr lang="en-US" sz="3400" b="1" dirty="0">
                 <a:solidFill>
                   <a:srgbClr val="E6EAF0"/>
                 </a:solidFill>
@@ -10139,36 +10229,36 @@
               </a:rPr>
               <a:t>1.5 мс</a:t>
             </a:r>
-            <a:endParaRPr lang="en-US" sz="4200" dirty="0"/>
-          </a:p>
-        </p:txBody>
-      </p:sp>
-      <p:sp>
-        <p:nvSpPr>
-          <p:cNvPr id="7" name="Text 5"/>
-          <p:cNvSpPr txBox="1"/>
-          <p:nvPr/>
-        </p:nvSpPr>
-        <p:spPr>
-          <a:xfrm>
-            <a:off x="548640" y="3017520"/>
-            <a:ext cx="2384984" cy="594360"/>
-          </a:xfrm>
-          <a:prstGeom prst="rect">
-            <a:avLst/>
-          </a:prstGeom>
-          <a:noFill/>
-          <a:ln/>
-        </p:spPr>
-        <p:txBody>
-          <a:bodyPr wrap="square" lIns="0" tIns="0" rIns="0" bIns="0" rtlCol="0" anchor="t"/>
-          <a:lstStyle/>
-          <a:p>
-            <a:pPr indent="0" marL="0">
-              <a:buNone/>
-            </a:pPr>
-            <a:r>
-              <a:rPr lang="en-US" sz="1300" dirty="0">
+            <a:endParaRPr lang="en-US" sz="3400" dirty="0"/>
+          </a:p>
+        </p:txBody>
+      </p:sp>
+      <p:sp>
+        <p:nvSpPr>
+          <p:cNvPr id="10" name="Text 7"/>
+          <p:cNvSpPr txBox="1"/>
+          <p:nvPr/>
+        </p:nvSpPr>
+        <p:spPr>
+          <a:xfrm>
+            <a:off x="548640" y="2633472"/>
+            <a:ext cx="2141068" cy="411480"/>
+          </a:xfrm>
+          <a:prstGeom prst="rect">
+            <a:avLst/>
+          </a:prstGeom>
+          <a:noFill/>
+          <a:ln/>
+        </p:spPr>
+        <p:txBody>
+          <a:bodyPr wrap="square" lIns="0" tIns="0" rIns="0" bIns="0" rtlCol="0" anchor="t"/>
+          <a:lstStyle/>
+          <a:p>
+            <a:pPr indent="0" marL="0">
+              <a:buNone/>
+            </a:pPr>
+            <a:r>
+              <a:rPr lang="en-US" sz="1200" dirty="0">
                 <a:solidFill>
                   <a:srgbClr val="8B93A1"/>
                 </a:solidFill>
@@ -10176,40 +10266,38 @@
                 <a:ea typeface="IBM Plex Sans" pitchFamily="34" charset="-122"/>
                 <a:cs typeface="IBM Plex Sans" pitchFamily="34" charset="-120"/>
               </a:rPr>
-              <a:t>инференс на батч 30 ТС</a:t>
-            </a:r>
-            <a:endParaRPr lang="en-US" sz="1300" dirty="0"/>
-          </a:p>
-        </p:txBody>
-      </p:sp>
-      <p:sp>
-        <p:nvSpPr>
-          <p:cNvPr id="8" name="Text 6"/>
-          <p:cNvSpPr txBox="1"/>
-          <p:nvPr/>
-        </p:nvSpPr>
-        <p:spPr>
-          <a:xfrm>
-            <a:off x="3390824" y="2103120"/>
-            <a:ext cx="2567864" cy="868680"/>
-          </a:xfrm>
-          <a:prstGeom prst="rect">
-            <a:avLst/>
-          </a:prstGeom>
-          <a:noFill/>
-          <a:ln/>
-        </p:spPr>
-        <p:txBody>
-          <a:bodyPr wrap="square" lIns="0" tIns="0" rIns="0" bIns="0" rtlCol="0" anchor="t">
-            <a:normAutofit/>
-          </a:bodyPr>
-          <a:lstStyle/>
-          <a:p>
-            <a:pPr indent="0" marL="0">
-              <a:buNone/>
-            </a:pPr>
-            <a:r>
-              <a:rPr lang="en-US" sz="4200" b="1" dirty="0">
+              <a:t>инференс ML, батч 30 ТС</a:t>
+            </a:r>
+            <a:endParaRPr lang="en-US" sz="1200" dirty="0"/>
+          </a:p>
+        </p:txBody>
+      </p:sp>
+      <p:sp>
+        <p:nvSpPr>
+          <p:cNvPr id="11" name="Text 8"/>
+          <p:cNvSpPr txBox="1"/>
+          <p:nvPr/>
+        </p:nvSpPr>
+        <p:spPr>
+          <a:xfrm>
+            <a:off x="2964028" y="1920240"/>
+            <a:ext cx="2141068" cy="685800"/>
+          </a:xfrm>
+          <a:prstGeom prst="rect">
+            <a:avLst/>
+          </a:prstGeom>
+          <a:noFill/>
+          <a:ln/>
+        </p:spPr>
+        <p:txBody>
+          <a:bodyPr wrap="square" lIns="0" tIns="0" rIns="0" bIns="0" rtlCol="0" anchor="t"/>
+          <a:lstStyle/>
+          <a:p>
+            <a:pPr indent="0" marL="0">
+              <a:buNone/>
+            </a:pPr>
+            <a:r>
+              <a:rPr lang="en-US" sz="3400" b="1" dirty="0">
                 <a:solidFill>
                   <a:srgbClr val="E6EAF0"/>
                 </a:solidFill>
@@ -10217,38 +10305,38 @@
                 <a:ea typeface="IBM Plex Sans" pitchFamily="34" charset="-122"/>
                 <a:cs typeface="IBM Plex Sans" pitchFamily="34" charset="-120"/>
               </a:rPr>
-              <a:t>&lt; 0.5 с</a:t>
-            </a:r>
-            <a:endParaRPr lang="en-US" sz="4200" dirty="0"/>
-          </a:p>
-        </p:txBody>
-      </p:sp>
-      <p:sp>
-        <p:nvSpPr>
-          <p:cNvPr id="9" name="Text 7"/>
-          <p:cNvSpPr txBox="1"/>
-          <p:nvPr/>
-        </p:nvSpPr>
-        <p:spPr>
-          <a:xfrm>
-            <a:off x="3390824" y="3017520"/>
-            <a:ext cx="2384984" cy="594360"/>
-          </a:xfrm>
-          <a:prstGeom prst="rect">
-            <a:avLst/>
-          </a:prstGeom>
-          <a:noFill/>
-          <a:ln/>
-        </p:spPr>
-        <p:txBody>
-          <a:bodyPr wrap="square" lIns="0" tIns="0" rIns="0" bIns="0" rtlCol="0" anchor="t"/>
-          <a:lstStyle/>
-          <a:p>
-            <a:pPr indent="0" marL="0">
-              <a:buNone/>
-            </a:pPr>
-            <a:r>
-              <a:rPr lang="en-US" sz="1300" dirty="0">
+              <a:t>&lt; 1 с</a:t>
+            </a:r>
+            <a:endParaRPr lang="en-US" sz="3400" dirty="0"/>
+          </a:p>
+        </p:txBody>
+      </p:sp>
+      <p:sp>
+        <p:nvSpPr>
+          <p:cNvPr id="12" name="Text 9"/>
+          <p:cNvSpPr txBox="1"/>
+          <p:nvPr/>
+        </p:nvSpPr>
+        <p:spPr>
+          <a:xfrm>
+            <a:off x="2964028" y="2633472"/>
+            <a:ext cx="2141068" cy="411480"/>
+          </a:xfrm>
+          <a:prstGeom prst="rect">
+            <a:avLst/>
+          </a:prstGeom>
+          <a:noFill/>
+          <a:ln/>
+        </p:spPr>
+        <p:txBody>
+          <a:bodyPr wrap="square" lIns="0" tIns="0" rIns="0" bIns="0" rtlCol="0" anchor="t"/>
+          <a:lstStyle/>
+          <a:p>
+            <a:pPr indent="0" marL="0">
+              <a:buNone/>
+            </a:pPr>
+            <a:r>
+              <a:rPr lang="en-US" sz="1200" dirty="0">
                 <a:solidFill>
                   <a:srgbClr val="8B93A1"/>
                 </a:solidFill>
@@ -10256,40 +10344,38 @@
                 <a:ea typeface="IBM Plex Sans" pitchFamily="34" charset="-122"/>
                 <a:cs typeface="IBM Plex Sans" pitchFamily="34" charset="-120"/>
               </a:rPr>
-              <a:t>полный путь пакет NDTP → дашборд</a:t>
-            </a:r>
-            <a:endParaRPr lang="en-US" sz="1300" dirty="0"/>
-          </a:p>
-        </p:txBody>
-      </p:sp>
-      <p:sp>
-        <p:nvSpPr>
-          <p:cNvPr id="10" name="Text 8"/>
-          <p:cNvSpPr txBox="1"/>
-          <p:nvPr/>
-        </p:nvSpPr>
-        <p:spPr>
-          <a:xfrm>
-            <a:off x="6233008" y="2103120"/>
-            <a:ext cx="2567864" cy="868680"/>
-          </a:xfrm>
-          <a:prstGeom prst="rect">
-            <a:avLst/>
-          </a:prstGeom>
-          <a:noFill/>
-          <a:ln/>
-        </p:spPr>
-        <p:txBody>
-          <a:bodyPr wrap="square" lIns="0" tIns="0" rIns="0" bIns="0" rtlCol="0" anchor="t">
-            <a:normAutofit/>
-          </a:bodyPr>
-          <a:lstStyle/>
-          <a:p>
-            <a:pPr indent="0" marL="0">
-              <a:buNone/>
-            </a:pPr>
-            <a:r>
-              <a:rPr lang="en-US" sz="4200" b="1" dirty="0">
+              <a:t>пакет → дашборд, p95</a:t>
+            </a:r>
+            <a:endParaRPr lang="en-US" sz="1200" dirty="0"/>
+          </a:p>
+        </p:txBody>
+      </p:sp>
+      <p:sp>
+        <p:nvSpPr>
+          <p:cNvPr id="13" name="Text 10"/>
+          <p:cNvSpPr txBox="1"/>
+          <p:nvPr/>
+        </p:nvSpPr>
+        <p:spPr>
+          <a:xfrm>
+            <a:off x="548640" y="3200400"/>
+            <a:ext cx="2141068" cy="685800"/>
+          </a:xfrm>
+          <a:prstGeom prst="rect">
+            <a:avLst/>
+          </a:prstGeom>
+          <a:noFill/>
+          <a:ln/>
+        </p:spPr>
+        <p:txBody>
+          <a:bodyPr wrap="square" lIns="0" tIns="0" rIns="0" bIns="0" rtlCol="0" anchor="t"/>
+          <a:lstStyle/>
+          <a:p>
+            <a:pPr indent="0" marL="0">
+              <a:buNone/>
+            </a:pPr>
+            <a:r>
+              <a:rPr lang="en-US" sz="3400" b="1" dirty="0">
                 <a:solidFill>
                   <a:srgbClr val="2FBF71"/>
                 </a:solidFill>
@@ -10299,36 +10385,36 @@
               </a:rPr>
               <a:t>0 потерь</a:t>
             </a:r>
-            <a:endParaRPr lang="en-US" sz="4200" dirty="0"/>
-          </a:p>
-        </p:txBody>
-      </p:sp>
-      <p:sp>
-        <p:nvSpPr>
-          <p:cNvPr id="11" name="Text 9"/>
-          <p:cNvSpPr txBox="1"/>
-          <p:nvPr/>
-        </p:nvSpPr>
-        <p:spPr>
-          <a:xfrm>
-            <a:off x="6233008" y="3017520"/>
-            <a:ext cx="2384984" cy="594360"/>
-          </a:xfrm>
-          <a:prstGeom prst="rect">
-            <a:avLst/>
-          </a:prstGeom>
-          <a:noFill/>
-          <a:ln/>
-        </p:spPr>
-        <p:txBody>
-          <a:bodyPr wrap="square" lIns="0" tIns="0" rIns="0" bIns="0" rtlCol="0" anchor="t"/>
-          <a:lstStyle/>
-          <a:p>
-            <a:pPr indent="0" marL="0">
-              <a:buNone/>
-            </a:pPr>
-            <a:r>
-              <a:rPr lang="en-US" sz="1300" dirty="0">
+            <a:endParaRPr lang="en-US" sz="3400" dirty="0"/>
+          </a:p>
+        </p:txBody>
+      </p:sp>
+      <p:sp>
+        <p:nvSpPr>
+          <p:cNvPr id="14" name="Text 11"/>
+          <p:cNvSpPr txBox="1"/>
+          <p:nvPr/>
+        </p:nvSpPr>
+        <p:spPr>
+          <a:xfrm>
+            <a:off x="548640" y="3913632"/>
+            <a:ext cx="2141068" cy="411480"/>
+          </a:xfrm>
+          <a:prstGeom prst="rect">
+            <a:avLst/>
+          </a:prstGeom>
+          <a:noFill/>
+          <a:ln/>
+        </p:spPr>
+        <p:txBody>
+          <a:bodyPr wrap="square" lIns="0" tIns="0" rIns="0" bIns="0" rtlCol="0" anchor="t"/>
+          <a:lstStyle/>
+          <a:p>
+            <a:pPr indent="0" marL="0">
+              <a:buNone/>
+            </a:pPr>
+            <a:r>
+              <a:rPr lang="en-US" sz="1200" dirty="0">
                 <a:solidFill>
                   <a:srgbClr val="8B93A1"/>
                 </a:solidFill>
@@ -10336,40 +10422,38 @@
                 <a:ea typeface="IBM Plex Sans" pitchFamily="34" charset="-122"/>
                 <a:cs typeface="IBM Plex Sans" pitchFamily="34" charset="-120"/>
               </a:rPr>
-              <a:t>300 TCP-соединений, 757 пакетов/с, пик 3 390</a:t>
-            </a:r>
-            <a:endParaRPr lang="en-US" sz="1300" dirty="0"/>
-          </a:p>
-        </p:txBody>
-      </p:sp>
-      <p:sp>
-        <p:nvSpPr>
-          <p:cNvPr id="12" name="Text 10"/>
-          <p:cNvSpPr txBox="1"/>
-          <p:nvPr/>
-        </p:nvSpPr>
-        <p:spPr>
-          <a:xfrm>
-            <a:off x="9075191" y="2103120"/>
-            <a:ext cx="2567864" cy="868680"/>
-          </a:xfrm>
-          <a:prstGeom prst="rect">
-            <a:avLst/>
-          </a:prstGeom>
-          <a:noFill/>
-          <a:ln/>
-        </p:spPr>
-        <p:txBody>
-          <a:bodyPr wrap="square" lIns="0" tIns="0" rIns="0" bIns="0" rtlCol="0" anchor="t">
-            <a:normAutofit/>
-          </a:bodyPr>
-          <a:lstStyle/>
-          <a:p>
-            <a:pPr indent="0" marL="0">
-              <a:buNone/>
-            </a:pPr>
-            <a:r>
-              <a:rPr lang="en-US" sz="4200" b="1" dirty="0">
+              <a:t>300 TCP · 757 пакетов/с</a:t>
+            </a:r>
+            <a:endParaRPr lang="en-US" sz="1200" dirty="0"/>
+          </a:p>
+        </p:txBody>
+      </p:sp>
+      <p:sp>
+        <p:nvSpPr>
+          <p:cNvPr id="15" name="Text 12"/>
+          <p:cNvSpPr txBox="1"/>
+          <p:nvPr/>
+        </p:nvSpPr>
+        <p:spPr>
+          <a:xfrm>
+            <a:off x="2964028" y="3200400"/>
+            <a:ext cx="2141068" cy="685800"/>
+          </a:xfrm>
+          <a:prstGeom prst="rect">
+            <a:avLst/>
+          </a:prstGeom>
+          <a:noFill/>
+          <a:ln/>
+        </p:spPr>
+        <p:txBody>
+          <a:bodyPr wrap="square" lIns="0" tIns="0" rIns="0" bIns="0" rtlCol="0" anchor="t"/>
+          <a:lstStyle/>
+          <a:p>
+            <a:pPr indent="0" marL="0">
+              <a:buNone/>
+            </a:pPr>
+            <a:r>
+              <a:rPr lang="en-US" sz="3400" b="1" dirty="0">
                 <a:solidFill>
                   <a:srgbClr val="E6EAF0"/>
                 </a:solidFill>
@@ -10379,36 +10463,36 @@
               </a:rPr>
               <a:t>17.5 с</a:t>
             </a:r>
-            <a:endParaRPr lang="en-US" sz="4200" dirty="0"/>
-          </a:p>
-        </p:txBody>
-      </p:sp>
-      <p:sp>
-        <p:nvSpPr>
-          <p:cNvPr id="13" name="Text 11"/>
-          <p:cNvSpPr txBox="1"/>
-          <p:nvPr/>
-        </p:nvSpPr>
-        <p:spPr>
-          <a:xfrm>
-            <a:off x="9075191" y="3017520"/>
-            <a:ext cx="2384984" cy="594360"/>
-          </a:xfrm>
-          <a:prstGeom prst="rect">
-            <a:avLst/>
-          </a:prstGeom>
-          <a:noFill/>
-          <a:ln/>
-        </p:spPr>
-        <p:txBody>
-          <a:bodyPr wrap="square" lIns="0" tIns="0" rIns="0" bIns="0" rtlCol="0" anchor="t"/>
-          <a:lstStyle/>
-          <a:p>
-            <a:pPr indent="0" marL="0">
-              <a:buNone/>
-            </a:pPr>
-            <a:r>
-              <a:rPr lang="en-US" sz="1300" dirty="0">
+            <a:endParaRPr lang="en-US" sz="3400" dirty="0"/>
+          </a:p>
+        </p:txBody>
+      </p:sp>
+      <p:sp>
+        <p:nvSpPr>
+          <p:cNvPr id="16" name="Text 13"/>
+          <p:cNvSpPr txBox="1"/>
+          <p:nvPr/>
+        </p:nvSpPr>
+        <p:spPr>
+          <a:xfrm>
+            <a:off x="2964028" y="3913632"/>
+            <a:ext cx="2141068" cy="411480"/>
+          </a:xfrm>
+          <a:prstGeom prst="rect">
+            <a:avLst/>
+          </a:prstGeom>
+          <a:noFill/>
+          <a:ln/>
+        </p:spPr>
+        <p:txBody>
+          <a:bodyPr wrap="square" lIns="0" tIns="0" rIns="0" bIns="0" rtlCol="0" anchor="t"/>
+          <a:lstStyle/>
+          <a:p>
+            <a:pPr indent="0" marL="0">
+              <a:buNone/>
+            </a:pPr>
+            <a:r>
+              <a:rPr lang="en-US" sz="1200" dirty="0">
                 <a:solidFill>
                   <a:srgbClr val="8B93A1"/>
                 </a:solidFill>
@@ -10416,21 +10500,21 @@
                 <a:ea typeface="IBM Plex Sans" pitchFamily="34" charset="-122"/>
                 <a:cs typeface="IBM Plex Sans" pitchFamily="34" charset="-120"/>
               </a:rPr>
-              <a:t>холодный старт до готовности всех сервисов</a:t>
-            </a:r>
-            <a:endParaRPr lang="en-US" sz="1300" dirty="0"/>
-          </a:p>
-        </p:txBody>
-      </p:sp>
-      <p:sp>
-        <p:nvSpPr>
-          <p:cNvPr id="14" name="Text 12"/>
-          <p:cNvSpPr txBox="1"/>
-          <p:nvPr/>
-        </p:nvSpPr>
-        <p:spPr>
-          <a:xfrm>
-            <a:off x="548640" y="4069080"/>
+              <a:t>холодный старт</a:t>
+            </a:r>
+            <a:endParaRPr lang="en-US" sz="1200" dirty="0"/>
+          </a:p>
+        </p:txBody>
+      </p:sp>
+      <p:sp>
+        <p:nvSpPr>
+          <p:cNvPr id="17" name="Text 14"/>
+          <p:cNvSpPr txBox="1"/>
+          <p:nvPr/>
+        </p:nvSpPr>
+        <p:spPr>
+          <a:xfrm>
+            <a:off x="548640" y="4480560"/>
             <a:ext cx="5486400" cy="274320"/>
           </a:xfrm>
           <a:prstGeom prst="rect">
@@ -10463,74 +10547,13 @@
       </p:sp>
       <p:sp>
         <p:nvSpPr>
-          <p:cNvPr id="15" name="Shape 13"/>
+          <p:cNvPr id="18" name="Shape 15"/>
           <p:cNvSpPr/>
           <p:nvPr/>
         </p:nvSpPr>
         <p:spPr>
           <a:xfrm>
-            <a:off x="548640" y="4434840"/>
-            <a:ext cx="3515258" cy="1600200"/>
-          </a:xfrm>
-          <a:prstGeom prst="roundRect">
-            <a:avLst>
-              <a:gd name="adj" fmla="val 4571"/>
-            </a:avLst>
-          </a:prstGeom>
-          <a:solidFill>
-            <a:srgbClr val="151A22"/>
-          </a:solidFill>
-          <a:ln/>
-        </p:spPr>
-      </p:sp>
-      <p:sp>
-        <p:nvSpPr>
-          <p:cNvPr id="16" name="Text 14"/>
-          <p:cNvSpPr txBox="1"/>
-          <p:nvPr/>
-        </p:nvSpPr>
-        <p:spPr>
-          <a:xfrm>
-            <a:off x="777240" y="4636008"/>
-            <a:ext cx="1777898" cy="320040"/>
-          </a:xfrm>
-          <a:prstGeom prst="rect">
-            <a:avLst/>
-          </a:prstGeom>
-          <a:noFill/>
-          <a:ln/>
-        </p:spPr>
-        <p:txBody>
-          <a:bodyPr wrap="square" lIns="0" tIns="0" rIns="0" bIns="0" rtlCol="0" anchor="t"/>
-          <a:lstStyle/>
-          <a:p>
-            <a:pPr indent="0" marL="0">
-              <a:buNone/>
-            </a:pPr>
-            <a:r>
-              <a:rPr lang="en-US" sz="1600" b="1" dirty="0">
-                <a:solidFill>
-                  <a:srgbClr val="E6EAF0"/>
-                </a:solidFill>
-                <a:latin typeface="IBM Plex Sans" pitchFamily="34" charset="0"/>
-                <a:ea typeface="IBM Plex Sans" pitchFamily="34" charset="-122"/>
-                <a:cs typeface="IBM Plex Sans" pitchFamily="34" charset="-120"/>
-              </a:rPr>
-              <a:t>Обрыв потока</a:t>
-            </a:r>
-            <a:endParaRPr lang="en-US" sz="1600" dirty="0"/>
-          </a:p>
-        </p:txBody>
-      </p:sp>
-      <p:sp>
-        <p:nvSpPr>
-          <p:cNvPr id="17" name="Shape 15"/>
-          <p:cNvSpPr/>
-          <p:nvPr/>
-        </p:nvSpPr>
-        <p:spPr>
-          <a:xfrm>
-            <a:off x="2646578" y="4636008"/>
+            <a:off x="548640" y="4873752"/>
             <a:ext cx="1188720" cy="310896"/>
           </a:xfrm>
           <a:prstGeom prst="roundRect">
@@ -10551,13 +10574,13 @@
       </p:sp>
       <p:sp>
         <p:nvSpPr>
-          <p:cNvPr id="18" name="Text 16"/>
-          <p:cNvSpPr txBox="1"/>
-          <p:nvPr/>
-        </p:nvSpPr>
-        <p:spPr>
-          <a:xfrm>
-            <a:off x="2646578" y="4636008"/>
+          <p:cNvPr id="19" name="Text 16"/>
+          <p:cNvSpPr txBox="1"/>
+          <p:nvPr/>
+        </p:nvSpPr>
+        <p:spPr>
+          <a:xfrm>
+            <a:off x="548640" y="4873752"/>
             <a:ext cx="1188720" cy="310896"/>
           </a:xfrm>
           <a:prstGeom prst="rect">
@@ -10590,25 +10613,39 @@
       </p:sp>
       <p:sp>
         <p:nvSpPr>
-          <p:cNvPr id="19" name="Text 17"/>
-          <p:cNvSpPr txBox="1"/>
-          <p:nvPr/>
-        </p:nvSpPr>
-        <p:spPr>
-          <a:xfrm>
-            <a:off x="777240" y="5093208"/>
-            <a:ext cx="3058058" cy="822960"/>
-          </a:xfrm>
-          <a:prstGeom prst="rect">
-            <a:avLst/>
-          </a:prstGeom>
-          <a:noFill/>
-          <a:ln/>
-        </p:spPr>
-        <p:txBody>
-          <a:bodyPr wrap="square" lIns="0" tIns="0" rIns="0" bIns="0" rtlCol="0" anchor="t"/>
-          <a:lstStyle/>
-          <a:p>
+          <p:cNvPr id="20" name="Text 17"/>
+          <p:cNvSpPr txBox="1"/>
+          <p:nvPr/>
+        </p:nvSpPr>
+        <p:spPr>
+          <a:xfrm>
+            <a:off x="1920240" y="4800600"/>
+            <a:ext cx="3184855" cy="457200"/>
+          </a:xfrm>
+          <a:prstGeom prst="rect">
+            <a:avLst/>
+          </a:prstGeom>
+          <a:noFill/>
+          <a:ln/>
+        </p:spPr>
+        <p:txBody>
+          <a:bodyPr wrap="square" lIns="0" tIns="0" rIns="0" bIns="0" rtlCol="0" anchor="ctr"/>
+          <a:lstStyle/>
+          <a:p>
+            <a:pPr indent="0" marL="0">
+              <a:buNone/>
+            </a:pPr>
+            <a:r>
+              <a:rPr lang="en-US" sz="1200" b="1" dirty="0">
+                <a:solidFill>
+                  <a:srgbClr val="E6EAF0"/>
+                </a:solidFill>
+                <a:latin typeface="IBM Plex Sans" pitchFamily="34" charset="0"/>
+                <a:ea typeface="IBM Plex Sans" pitchFamily="34" charset="-122"/>
+                <a:cs typeface="IBM Plex Sans" pitchFamily="34" charset="-120"/>
+              </a:rPr>
+              <a:t>Обрыв потока  </a:t>
+            </a:r>
             <a:pPr indent="0" marL="0">
               <a:buNone/>
             </a:pPr>
@@ -10621,7 +10658,7 @@
                 <a:ea typeface="IBM Plex Sans" pitchFamily="34" charset="-122"/>
                 <a:cs typeface="IBM Plex Sans" pitchFamily="34" charset="-120"/>
               </a:rPr>
-              <a:t>через 30 с баннер, прогнозы по последнему состоянию; поток вернулся — LIVE</a:t>
+              <a:t>через 30 с — работа по последнему состоянию</a:t>
             </a:r>
             <a:endParaRPr lang="en-US" sz="1200" dirty="0"/>
           </a:p>
@@ -10629,74 +10666,13 @@
       </p:sp>
       <p:sp>
         <p:nvSpPr>
-          <p:cNvPr id="20" name="Shape 18"/>
+          <p:cNvPr id="21" name="Shape 18"/>
           <p:cNvSpPr/>
           <p:nvPr/>
         </p:nvSpPr>
         <p:spPr>
           <a:xfrm>
-            <a:off x="4338218" y="4434840"/>
-            <a:ext cx="3515258" cy="1600200"/>
-          </a:xfrm>
-          <a:prstGeom prst="roundRect">
-            <a:avLst>
-              <a:gd name="adj" fmla="val 4571"/>
-            </a:avLst>
-          </a:prstGeom>
-          <a:solidFill>
-            <a:srgbClr val="151A22"/>
-          </a:solidFill>
-          <a:ln/>
-        </p:spPr>
-      </p:sp>
-      <p:sp>
-        <p:nvSpPr>
-          <p:cNvPr id="21" name="Text 19"/>
-          <p:cNvSpPr txBox="1"/>
-          <p:nvPr/>
-        </p:nvSpPr>
-        <p:spPr>
-          <a:xfrm>
-            <a:off x="4566818" y="4636008"/>
-            <a:ext cx="1777898" cy="320040"/>
-          </a:xfrm>
-          <a:prstGeom prst="rect">
-            <a:avLst/>
-          </a:prstGeom>
-          <a:noFill/>
-          <a:ln/>
-        </p:spPr>
-        <p:txBody>
-          <a:bodyPr wrap="square" lIns="0" tIns="0" rIns="0" bIns="0" rtlCol="0" anchor="t"/>
-          <a:lstStyle/>
-          <a:p>
-            <a:pPr indent="0" marL="0">
-              <a:buNone/>
-            </a:pPr>
-            <a:r>
-              <a:rPr lang="en-US" sz="1600" b="1" dirty="0">
-                <a:solidFill>
-                  <a:srgbClr val="E6EAF0"/>
-                </a:solidFill>
-                <a:latin typeface="IBM Plex Sans" pitchFamily="34" charset="0"/>
-                <a:ea typeface="IBM Plex Sans" pitchFamily="34" charset="-122"/>
-                <a:cs typeface="IBM Plex Sans" pitchFamily="34" charset="-120"/>
-              </a:rPr>
-              <a:t>Падение ML</a:t>
-            </a:r>
-            <a:endParaRPr lang="en-US" sz="1600" dirty="0"/>
-          </a:p>
-        </p:txBody>
-      </p:sp>
-      <p:sp>
-        <p:nvSpPr>
-          <p:cNvPr id="22" name="Shape 20"/>
-          <p:cNvSpPr/>
-          <p:nvPr/>
-        </p:nvSpPr>
-        <p:spPr>
-          <a:xfrm>
-            <a:off x="6436157" y="4636008"/>
+            <a:off x="548640" y="5422392"/>
             <a:ext cx="1188720" cy="310896"/>
           </a:xfrm>
           <a:prstGeom prst="roundRect">
@@ -10717,13 +10693,13 @@
       </p:sp>
       <p:sp>
         <p:nvSpPr>
-          <p:cNvPr id="23" name="Text 21"/>
-          <p:cNvSpPr txBox="1"/>
-          <p:nvPr/>
-        </p:nvSpPr>
-        <p:spPr>
-          <a:xfrm>
-            <a:off x="6436157" y="4636008"/>
+          <p:cNvPr id="22" name="Text 19"/>
+          <p:cNvSpPr txBox="1"/>
+          <p:nvPr/>
+        </p:nvSpPr>
+        <p:spPr>
+          <a:xfrm>
+            <a:off x="548640" y="5422392"/>
             <a:ext cx="1188720" cy="310896"/>
           </a:xfrm>
           <a:prstGeom prst="rect">
@@ -10756,25 +10732,39 @@
       </p:sp>
       <p:sp>
         <p:nvSpPr>
-          <p:cNvPr id="24" name="Text 22"/>
-          <p:cNvSpPr txBox="1"/>
-          <p:nvPr/>
-        </p:nvSpPr>
-        <p:spPr>
-          <a:xfrm>
-            <a:off x="4566818" y="5093208"/>
-            <a:ext cx="3058058" cy="822960"/>
-          </a:xfrm>
-          <a:prstGeom prst="rect">
-            <a:avLst/>
-          </a:prstGeom>
-          <a:noFill/>
-          <a:ln/>
-        </p:spPr>
-        <p:txBody>
-          <a:bodyPr wrap="square" lIns="0" tIns="0" rIns="0" bIns="0" rtlCol="0" anchor="t"/>
-          <a:lstStyle/>
-          <a:p>
+          <p:cNvPr id="23" name="Text 20"/>
+          <p:cNvSpPr txBox="1"/>
+          <p:nvPr/>
+        </p:nvSpPr>
+        <p:spPr>
+          <a:xfrm>
+            <a:off x="1920240" y="5349240"/>
+            <a:ext cx="3184855" cy="457200"/>
+          </a:xfrm>
+          <a:prstGeom prst="rect">
+            <a:avLst/>
+          </a:prstGeom>
+          <a:noFill/>
+          <a:ln/>
+        </p:spPr>
+        <p:txBody>
+          <a:bodyPr wrap="square" lIns="0" tIns="0" rIns="0" bIns="0" rtlCol="0" anchor="ctr"/>
+          <a:lstStyle/>
+          <a:p>
+            <a:pPr indent="0" marL="0">
+              <a:buNone/>
+            </a:pPr>
+            <a:r>
+              <a:rPr lang="en-US" sz="1200" b="1" dirty="0">
+                <a:solidFill>
+                  <a:srgbClr val="E6EAF0"/>
+                </a:solidFill>
+                <a:latin typeface="IBM Plex Sans" pitchFamily="34" charset="0"/>
+                <a:ea typeface="IBM Plex Sans" pitchFamily="34" charset="-122"/>
+                <a:cs typeface="IBM Plex Sans" pitchFamily="34" charset="-120"/>
+              </a:rPr>
+              <a:t>Падение ML  </a:t>
+            </a:r>
             <a:pPr indent="0" marL="0">
               <a:buNone/>
             </a:pPr>
@@ -10787,7 +10777,7 @@
                 <a:ea typeface="IBM Plex Sans" pitchFamily="34" charset="-122"/>
                 <a:cs typeface="IBM Plex Sans" pitchFamily="34" charset="-120"/>
               </a:rPr>
-              <a:t>circuit breaker → эвристика, карта и лента работают; восстановление ≤ 10 с</a:t>
+              <a:t>circuit breaker → эвристика, карта жива</a:t>
             </a:r>
             <a:endParaRPr lang="en-US" sz="1200" dirty="0"/>
           </a:p>
@@ -10795,74 +10785,13 @@
       </p:sp>
       <p:sp>
         <p:nvSpPr>
-          <p:cNvPr id="25" name="Shape 23"/>
+          <p:cNvPr id="24" name="Shape 21"/>
           <p:cNvSpPr/>
           <p:nvPr/>
         </p:nvSpPr>
         <p:spPr>
           <a:xfrm>
-            <a:off x="8127797" y="4434840"/>
-            <a:ext cx="3515258" cy="1600200"/>
-          </a:xfrm>
-          <a:prstGeom prst="roundRect">
-            <a:avLst>
-              <a:gd name="adj" fmla="val 4571"/>
-            </a:avLst>
-          </a:prstGeom>
-          <a:solidFill>
-            <a:srgbClr val="151A22"/>
-          </a:solidFill>
-          <a:ln/>
-        </p:spPr>
-      </p:sp>
-      <p:sp>
-        <p:nvSpPr>
-          <p:cNvPr id="26" name="Text 24"/>
-          <p:cNvSpPr txBox="1"/>
-          <p:nvPr/>
-        </p:nvSpPr>
-        <p:spPr>
-          <a:xfrm>
-            <a:off x="8356397" y="4636008"/>
-            <a:ext cx="1777898" cy="320040"/>
-          </a:xfrm>
-          <a:prstGeom prst="rect">
-            <a:avLst/>
-          </a:prstGeom>
-          <a:noFill/>
-          <a:ln/>
-        </p:spPr>
-        <p:txBody>
-          <a:bodyPr wrap="square" lIns="0" tIns="0" rIns="0" bIns="0" rtlCol="0" anchor="t"/>
-          <a:lstStyle/>
-          <a:p>
-            <a:pPr indent="0" marL="0">
-              <a:buNone/>
-            </a:pPr>
-            <a:r>
-              <a:rPr lang="en-US" sz="1600" b="1" dirty="0">
-                <a:solidFill>
-                  <a:srgbClr val="E6EAF0"/>
-                </a:solidFill>
-                <a:latin typeface="IBM Plex Sans" pitchFamily="34" charset="0"/>
-                <a:ea typeface="IBM Plex Sans" pitchFamily="34" charset="-122"/>
-                <a:cs typeface="IBM Plex Sans" pitchFamily="34" charset="-120"/>
-              </a:rPr>
-              <a:t>Рестарт backend</a:t>
-            </a:r>
-            <a:endParaRPr lang="en-US" sz="1600" dirty="0"/>
-          </a:p>
-        </p:txBody>
-      </p:sp>
-      <p:sp>
-        <p:nvSpPr>
-          <p:cNvPr id="27" name="Shape 25"/>
-          <p:cNvSpPr/>
-          <p:nvPr/>
-        </p:nvSpPr>
-        <p:spPr>
-          <a:xfrm>
-            <a:off x="10225735" y="4636008"/>
+            <a:off x="548640" y="5971032"/>
             <a:ext cx="1188720" cy="310896"/>
           </a:xfrm>
           <a:prstGeom prst="roundRect">
@@ -10883,13 +10812,13 @@
       </p:sp>
       <p:sp>
         <p:nvSpPr>
-          <p:cNvPr id="28" name="Text 26"/>
-          <p:cNvSpPr txBox="1"/>
-          <p:nvPr/>
-        </p:nvSpPr>
-        <p:spPr>
-          <a:xfrm>
-            <a:off x="10225735" y="4636008"/>
+          <p:cNvPr id="25" name="Text 22"/>
+          <p:cNvSpPr txBox="1"/>
+          <p:nvPr/>
+        </p:nvSpPr>
+        <p:spPr>
+          <a:xfrm>
+            <a:off x="548640" y="5971032"/>
             <a:ext cx="1188720" cy="310896"/>
           </a:xfrm>
           <a:prstGeom prst="rect">
@@ -10922,25 +10851,39 @@
       </p:sp>
       <p:sp>
         <p:nvSpPr>
-          <p:cNvPr id="29" name="Text 27"/>
-          <p:cNvSpPr txBox="1"/>
-          <p:nvPr/>
-        </p:nvSpPr>
-        <p:spPr>
-          <a:xfrm>
-            <a:off x="8356397" y="5093208"/>
-            <a:ext cx="3058058" cy="822960"/>
-          </a:xfrm>
-          <a:prstGeom prst="rect">
-            <a:avLst/>
-          </a:prstGeom>
-          <a:noFill/>
-          <a:ln/>
-        </p:spPr>
-        <p:txBody>
-          <a:bodyPr wrap="square" lIns="0" tIns="0" rIns="0" bIns="0" rtlCol="0" anchor="t"/>
-          <a:lstStyle/>
-          <a:p>
+          <p:cNvPr id="26" name="Text 23"/>
+          <p:cNvSpPr txBox="1"/>
+          <p:nvPr/>
+        </p:nvSpPr>
+        <p:spPr>
+          <a:xfrm>
+            <a:off x="1920240" y="5897880"/>
+            <a:ext cx="3184855" cy="457200"/>
+          </a:xfrm>
+          <a:prstGeom prst="rect">
+            <a:avLst/>
+          </a:prstGeom>
+          <a:noFill/>
+          <a:ln/>
+        </p:spPr>
+        <p:txBody>
+          <a:bodyPr wrap="square" lIns="0" tIns="0" rIns="0" bIns="0" rtlCol="0" anchor="ctr"/>
+          <a:lstStyle/>
+          <a:p>
+            <a:pPr indent="0" marL="0">
+              <a:buNone/>
+            </a:pPr>
+            <a:r>
+              <a:rPr lang="en-US" sz="1200" b="1" dirty="0">
+                <a:solidFill>
+                  <a:srgbClr val="E6EAF0"/>
+                </a:solidFill>
+                <a:latin typeface="IBM Plex Sans" pitchFamily="34" charset="0"/>
+                <a:ea typeface="IBM Plex Sans" pitchFamily="34" charset="-122"/>
+                <a:cs typeface="IBM Plex Sans" pitchFamily="34" charset="-120"/>
+              </a:rPr>
+              <a:t>Рестарт backend  </a:t>
+            </a:r>
             <a:pPr indent="0" marL="0">
               <a:buNone/>
             </a:pPr>
@@ -10953,7 +10896,7 @@
                 <a:ea typeface="IBM Plex Sans" pitchFamily="34" charset="-122"/>
                 <a:cs typeface="IBM Plex Sans" pitchFamily="34" charset="-120"/>
               </a:rPr>
-              <a:t>все 30 бортов переподключаются сами, прогнозы восстанавливаются</a:t>
+              <a:t>30 бортов переподключаются сами</a:t>
             </a:r>
             <a:endParaRPr lang="en-US" sz="1200" dirty="0"/>
           </a:p>
@@ -11863,7 +11806,7 @@
                 <a:ea typeface="IBM Plex Sans" pitchFamily="34" charset="-122"/>
                 <a:cs typeface="IBM Plex Sans" pitchFamily="34" charset="-120"/>
               </a:rPr>
-              <a:t>Наблюдаемость</a:t>
+              <a:t>Drawer ТС и «Система»</a:t>
             </a:r>
             <a:endParaRPr lang="en-US" sz="1600" dirty="0"/>
           </a:p>
@@ -11902,7 +11845,7 @@
                 <a:ea typeface="IBM Plex Sans" pitchFamily="34" charset="-122"/>
                 <a:cs typeface="IBM Plex Sans" pitchFamily="34" charset="-120"/>
               </a:rPr>
-              <a:t>Prometheus, журнал прогнозов, последний NDTP-пакет в hex</a:t>
+              <a:t>график отклонения и остановки ±60 мин; латентности, приём NDTP, пакет в hex</a:t>
             </a:r>
             <a:endParaRPr lang="en-US" sz="1200" dirty="0"/>
           </a:p>

--- a/docs/pitch/transit-pulse-pitch.pptx
+++ b/docs/pitch/transit-pulse-pitch.pptx
@@ -1040,7 +1040,7 @@
           <a:p>
             <a:r>
               <a:rPr lang="en-US" dirty="0"/>
-              <a:t>[~35 с] Ядро — CatBoost по квантилям плюс GRU по треку телеметрии. 28 признаков на момент T; квантили дают прогноз, вероятность опоздания и интервал, откалиброванный до 80 процентов. GRU обучена на GPU и работает через ONNX. Верхняя строка таблицы — как на лидерборде: 52 секунды. Нижняя — честный «новый день» без клонов: 67 секунд против 88 у baseline организаторов. Минус 24 процента даже в честной оценке.</a:t>
+              <a:t>[~35 с] Ядро — CatBoost по квантилям плюс GRU по треку телеметрии, 28 признаков на момент T. Верхняя строка таблицы — как на лидерборде: 52 секунды. Нижняя — честный «новый день» без клонов: 67 секунд против 88 у baseline организаторов, минус 24 процента. Квантили дают прогноз, вероятность опоздания и интервал — и мы их откалибровали: ошибка вероятности ECE упала с 0.11 до 0.03, а интервал держит 80 процентов на каждой минуте упреждения, раньше на 13–15 минутах было только 65.</a:t>
             </a:r>
             <a:endParaRPr lang="en-US" dirty="0"/>
           </a:p>
@@ -1128,7 +1128,8 @@
           <a:p>
             <a:r>
               <a:rPr lang="en-US" dirty="0"/>
-              <a:t>[~35 с] Главное — горизонт. На потоке мы прогнозируем все остановки в окне 10–15 минут, инцидент открывается на первом красном прогнозе, задним числом — никогда. Мы проиграли весь день через настоящий путь NDTP — backend — ML и сверили с реальной разметкой: прогноз есть для всех 353 точек, 100 процентов прогнозов строго в окне, все 241 алерт — с упреждением от 10 минут. Поток и офлайн совпадают до 0.03 секунды, а честная ошибка на потоке — 78 секунд против 93 у подсказки организаторов, которая знает будущее.</a:t>
+              <a:t>[~35 с] Главное — горизонт. На потоке мы прогнозируем все остановки в окне 10–15 минут; задним числом алерт не бывает никогда. Мы проиграли весь день через настоящий путь NDTP — backend — ML и сверили с реальной разметкой: прогноз есть для всех 353 точек, 100 процентов прогнозов строго в окне, поток и офлайн совпадают до 0.03 секунды, честная ошибка на потоке — 78 секунд против 93 у подсказки организаторов. Алерт открывается, только если условие держится три прохода подряд — так мы отсекаем мигающие красные: за день 162 инцидента, у 96 процентов опоздавших рейсов был алерт, все — за 10 минут и раньше.
+Если спросят «сколько ложных алертов?»: честно, на прогнозах моделей, не видевших этот день, — 0.86 алерта на машину в час, точность 49 процентов, то есть примерно каждый второй алерт подтверждается опозданием больше двух минут; было 1.24 и 41 процент, при этом 85 процентов опоздавших рейсов по-прежнему с алертом. 67 процентов точности на потоке — это финальная модель, которая видела test, эту цифру мы честной не считаем. Пороги вынесены в настройки: диспетчерская может выбрать меньше алертов ценой полноты.</a:t>
             </a:r>
             <a:endParaRPr lang="en-US" dirty="0"/>
           </a:p>
@@ -1304,7 +1305,7 @@
           <a:p>
             <a:r>
               <a:rPr lang="en-US" dirty="0"/>
-              <a:t>[~25 с] Инференс — полторы миллисекунды на батч из 30 машин; от пакета NDTP до дашборда — меньше секунды по p95. Под нагрузкой — 300 TCP-соединений и ноль потерь. Справа — панель «Система» прямо из дашборда: ноль потерь, ноль ошибок CRC, все алерты — за 10 минут и раньше. Оборвался поток — DEGRADED; упал ML — эвристика; рестарт backend — борта переподключаются сами. Холодный старт — 17 с половиной секунд.</a:t>
+              <a:t>[~25 с] Инференс — полторы миллисекунды на батч из 30 машин, на потоке весь батч ML — 54 миллисекунды, проход прогнозов до рассылки — 238 по p95; от пакета NDTP до дашборда — меньше секунды. Под нагрузкой — 300 TCP-соединений и ноль потерь. Справа — панель «Система» прямо из дашборда: ноль потерь, ноль ошибок CRC, все алерты — за 10 минут и раньше. Оборвался поток — DEGRADED; упал ML — эвристика; рестарт backend — борта переподключаются сами. Холодный старт — 17 с половиной секунд.</a:t>
             </a:r>
             <a:endParaRPr lang="en-US" dirty="0"/>
           </a:p>
@@ -1392,7 +1393,7 @@
           <a:p>
             <a:r>
               <a:rPr lang="en-US" dirty="0"/>
-              <a:t>[~15 с] Все дополнительные фичи из ТЗ сделаны: map-matching с учётом специфики NDTP — в 1.9 раза точнее, what-if, ONNX, ансамбль CatBoost и PyTorch GRU. Плюс собственный NDTP-кодек, байт-в-байт как официальный эмулятор, больше двухсот автотестов, а в дашборде — drawer ТС с графиком отклонения и панель «Система».</a:t>
+              <a:t>[~15 с] Все дополнительные фичи из ТЗ сделаны: map-matching с учётом специфики NDTP — в 1.9 раза точнее, what-if, ONNX, ансамбль CatBoost и PyTorch GRU, собственный NDTP-кодек, больше двухсот автотестов, drawer ТС и панель «Система». И честно о том, что не взяли: отклонение по нитке как признак дало минус 1.3 секунды при нашем пороге внедрения 2 секунды, а GRU в ансамбле — всего минус 0.2 секунды.</a:t>
             </a:r>
             <a:endParaRPr lang="en-US" dirty="0"/>
           </a:p>
@@ -7755,40 +7756,316 @@
         </p:nvSpPr>
         <p:spPr>
           <a:xfrm>
-            <a:off x="548640" y="5166360"/>
-            <a:ext cx="7406640" cy="548640"/>
-          </a:xfrm>
-          <a:prstGeom prst="rect">
-            <a:avLst/>
-          </a:prstGeom>
-          <a:noFill/>
-          <a:ln/>
-        </p:spPr>
-        <p:txBody>
-          <a:bodyPr wrap="square" lIns="0" tIns="0" rIns="0" bIns="0" rtlCol="0" anchor="t"/>
-          <a:lstStyle/>
-          <a:p>
-            <a:pPr indent="0" marL="0">
-              <a:buNone/>
-            </a:pPr>
-            <a:r>
-              <a:rPr lang="en-US" sz="1300" dirty="0">
+            <a:off x="548640" y="5230368"/>
+            <a:ext cx="2743200" cy="228600"/>
+          </a:xfrm>
+          <a:prstGeom prst="rect">
+            <a:avLst/>
+          </a:prstGeom>
+          <a:noFill/>
+          <a:ln/>
+        </p:spPr>
+        <p:txBody>
+          <a:bodyPr wrap="square" lIns="0" tIns="0" rIns="0" bIns="0" rtlCol="0" anchor="t"/>
+          <a:lstStyle/>
+          <a:p>
+            <a:pPr indent="0" marL="0">
+              <a:buNone/>
+            </a:pPr>
+            <a:r>
+              <a:rPr lang="en-US" sz="1000" spc="200" kern="0" dirty="0">
+                <a:solidFill>
+                  <a:srgbClr val="5B6472"/>
+                </a:solidFill>
+                <a:latin typeface="IBM Plex Mono" pitchFamily="34" charset="0"/>
+                <a:ea typeface="IBM Plex Mono" pitchFamily="34" charset="-122"/>
+                <a:cs typeface="IBM Plex Mono" pitchFamily="34" charset="-120"/>
+              </a:rPr>
+              <a:t>КАЛИБРОВКА</a:t>
+            </a:r>
+            <a:endParaRPr lang="en-US" sz="1000" dirty="0"/>
+          </a:p>
+        </p:txBody>
+      </p:sp>
+      <p:sp>
+        <p:nvSpPr>
+          <p:cNvPr id="9" name="Text 6"/>
+          <p:cNvSpPr txBox="1"/>
+          <p:nvPr/>
+        </p:nvSpPr>
+        <p:spPr>
+          <a:xfrm>
+            <a:off x="548640" y="5486400"/>
+            <a:ext cx="2346960" cy="384048"/>
+          </a:xfrm>
+          <a:prstGeom prst="rect">
+            <a:avLst/>
+          </a:prstGeom>
+          <a:noFill/>
+          <a:ln/>
+        </p:spPr>
+        <p:txBody>
+          <a:bodyPr wrap="square" lIns="0" tIns="0" rIns="0" bIns="0" rtlCol="0" anchor="t"/>
+          <a:lstStyle/>
+          <a:p>
+            <a:pPr indent="0" marL="0">
+              <a:buNone/>
+            </a:pPr>
+            <a:r>
+              <a:rPr lang="en-US" sz="2000" dirty="0">
                 <a:solidFill>
                   <a:srgbClr val="8B93A1"/>
                 </a:solidFill>
-                <a:latin typeface="IBM Plex Sans" pitchFamily="34" charset="0"/>
-                <a:ea typeface="IBM Plex Sans" pitchFamily="34" charset="-122"/>
-                <a:cs typeface="IBM Plex Sans" pitchFamily="34" charset="-120"/>
-              </a:rPr>
-              <a:t>Мы показываем обе строки: верхняя сравнима с лидербордом, нижняя — то, что будет на новом дне.</a:t>
-            </a:r>
-            <a:endParaRPr lang="en-US" sz="1300" dirty="0"/>
-          </a:p>
-        </p:txBody>
-      </p:sp>
-      <p:sp>
-        <p:nvSpPr>
-          <p:cNvPr id="9" name="Shape 6"/>
+                <a:latin typeface="IBM Plex Mono" pitchFamily="34" charset="0"/>
+                <a:ea typeface="IBM Plex Mono" pitchFamily="34" charset="-122"/>
+                <a:cs typeface="IBM Plex Mono" pitchFamily="34" charset="-120"/>
+              </a:rPr>
+              <a:t>0.154 → </a:t>
+            </a:r>
+            <a:pPr indent="0" marL="0">
+              <a:buNone/>
+            </a:pPr>
+            <a:r>
+              <a:rPr lang="en-US" sz="2000" b="1" dirty="0">
+                <a:solidFill>
+                  <a:srgbClr val="2FBF71"/>
+                </a:solidFill>
+                <a:latin typeface="IBM Plex Mono" pitchFamily="34" charset="0"/>
+                <a:ea typeface="IBM Plex Mono" pitchFamily="34" charset="-122"/>
+                <a:cs typeface="IBM Plex Mono" pitchFamily="34" charset="-120"/>
+              </a:rPr>
+              <a:t>0.140</a:t>
+            </a:r>
+            <a:endParaRPr lang="en-US" sz="2000" dirty="0"/>
+          </a:p>
+        </p:txBody>
+      </p:sp>
+      <p:sp>
+        <p:nvSpPr>
+          <p:cNvPr id="10" name="Text 7"/>
+          <p:cNvSpPr txBox="1"/>
+          <p:nvPr/>
+        </p:nvSpPr>
+        <p:spPr>
+          <a:xfrm>
+            <a:off x="548640" y="5897880"/>
+            <a:ext cx="2346960" cy="256032"/>
+          </a:xfrm>
+          <a:prstGeom prst="rect">
+            <a:avLst/>
+          </a:prstGeom>
+          <a:noFill/>
+          <a:ln/>
+        </p:spPr>
+        <p:txBody>
+          <a:bodyPr wrap="square" lIns="0" tIns="0" rIns="0" bIns="0" rtlCol="0" anchor="t"/>
+          <a:lstStyle/>
+          <a:p>
+            <a:pPr indent="0" marL="0">
+              <a:buNone/>
+            </a:pPr>
+            <a:r>
+              <a:rPr lang="en-US" sz="1100" dirty="0">
+                <a:solidFill>
+                  <a:srgbClr val="8B93A1"/>
+                </a:solidFill>
+                <a:latin typeface="IBM Plex Sans" pitchFamily="34" charset="0"/>
+                <a:ea typeface="IBM Plex Sans" pitchFamily="34" charset="-122"/>
+                <a:cs typeface="IBM Plex Sans" pitchFamily="34" charset="-120"/>
+              </a:rPr>
+              <a:t>Brier p_late</a:t>
+            </a:r>
+            <a:endParaRPr lang="en-US" sz="1100" dirty="0"/>
+          </a:p>
+        </p:txBody>
+      </p:sp>
+      <p:sp>
+        <p:nvSpPr>
+          <p:cNvPr id="11" name="Text 8"/>
+          <p:cNvSpPr txBox="1"/>
+          <p:nvPr/>
+        </p:nvSpPr>
+        <p:spPr>
+          <a:xfrm>
+            <a:off x="3078480" y="5486400"/>
+            <a:ext cx="2346960" cy="384048"/>
+          </a:xfrm>
+          <a:prstGeom prst="rect">
+            <a:avLst/>
+          </a:prstGeom>
+          <a:noFill/>
+          <a:ln/>
+        </p:spPr>
+        <p:txBody>
+          <a:bodyPr wrap="square" lIns="0" tIns="0" rIns="0" bIns="0" rtlCol="0" anchor="t"/>
+          <a:lstStyle/>
+          <a:p>
+            <a:pPr indent="0" marL="0">
+              <a:buNone/>
+            </a:pPr>
+            <a:r>
+              <a:rPr lang="en-US" sz="2000" dirty="0">
+                <a:solidFill>
+                  <a:srgbClr val="8B93A1"/>
+                </a:solidFill>
+                <a:latin typeface="IBM Plex Mono" pitchFamily="34" charset="0"/>
+                <a:ea typeface="IBM Plex Mono" pitchFamily="34" charset="-122"/>
+                <a:cs typeface="IBM Plex Mono" pitchFamily="34" charset="-120"/>
+              </a:rPr>
+              <a:t>0.111 → </a:t>
+            </a:r>
+            <a:pPr indent="0" marL="0">
+              <a:buNone/>
+            </a:pPr>
+            <a:r>
+              <a:rPr lang="en-US" sz="2000" b="1" dirty="0">
+                <a:solidFill>
+                  <a:srgbClr val="2FBF71"/>
+                </a:solidFill>
+                <a:latin typeface="IBM Plex Mono" pitchFamily="34" charset="0"/>
+                <a:ea typeface="IBM Plex Mono" pitchFamily="34" charset="-122"/>
+                <a:cs typeface="IBM Plex Mono" pitchFamily="34" charset="-120"/>
+              </a:rPr>
+              <a:t>0.033</a:t>
+            </a:r>
+            <a:endParaRPr lang="en-US" sz="2000" dirty="0"/>
+          </a:p>
+        </p:txBody>
+      </p:sp>
+      <p:sp>
+        <p:nvSpPr>
+          <p:cNvPr id="12" name="Text 9"/>
+          <p:cNvSpPr txBox="1"/>
+          <p:nvPr/>
+        </p:nvSpPr>
+        <p:spPr>
+          <a:xfrm>
+            <a:off x="3078480" y="5897880"/>
+            <a:ext cx="2346960" cy="256032"/>
+          </a:xfrm>
+          <a:prstGeom prst="rect">
+            <a:avLst/>
+          </a:prstGeom>
+          <a:noFill/>
+          <a:ln/>
+        </p:spPr>
+        <p:txBody>
+          <a:bodyPr wrap="square" lIns="0" tIns="0" rIns="0" bIns="0" rtlCol="0" anchor="t"/>
+          <a:lstStyle/>
+          <a:p>
+            <a:pPr indent="0" marL="0">
+              <a:buNone/>
+            </a:pPr>
+            <a:r>
+              <a:rPr lang="en-US" sz="1100" dirty="0">
+                <a:solidFill>
+                  <a:srgbClr val="8B93A1"/>
+                </a:solidFill>
+                <a:latin typeface="IBM Plex Sans" pitchFamily="34" charset="0"/>
+                <a:ea typeface="IBM Plex Sans" pitchFamily="34" charset="-122"/>
+                <a:cs typeface="IBM Plex Sans" pitchFamily="34" charset="-120"/>
+              </a:rPr>
+              <a:t>ECE p_late</a:t>
+            </a:r>
+            <a:endParaRPr lang="en-US" sz="1100" dirty="0"/>
+          </a:p>
+        </p:txBody>
+      </p:sp>
+      <p:sp>
+        <p:nvSpPr>
+          <p:cNvPr id="13" name="Text 10"/>
+          <p:cNvSpPr txBox="1"/>
+          <p:nvPr/>
+        </p:nvSpPr>
+        <p:spPr>
+          <a:xfrm>
+            <a:off x="5608320" y="5486400"/>
+            <a:ext cx="2346960" cy="384048"/>
+          </a:xfrm>
+          <a:prstGeom prst="rect">
+            <a:avLst/>
+          </a:prstGeom>
+          <a:noFill/>
+          <a:ln/>
+        </p:spPr>
+        <p:txBody>
+          <a:bodyPr wrap="square" lIns="0" tIns="0" rIns="0" bIns="0" rtlCol="0" anchor="t"/>
+          <a:lstStyle/>
+          <a:p>
+            <a:pPr indent="0" marL="0">
+              <a:buNone/>
+            </a:pPr>
+            <a:r>
+              <a:rPr lang="en-US" sz="2000" dirty="0">
+                <a:solidFill>
+                  <a:srgbClr val="8B93A1"/>
+                </a:solidFill>
+                <a:latin typeface="IBM Plex Mono" pitchFamily="34" charset="0"/>
+                <a:ea typeface="IBM Plex Mono" pitchFamily="34" charset="-122"/>
+                <a:cs typeface="IBM Plex Mono" pitchFamily="34" charset="-120"/>
+              </a:rPr>
+              <a:t>65% → </a:t>
+            </a:r>
+            <a:pPr indent="0" marL="0">
+              <a:buNone/>
+            </a:pPr>
+            <a:r>
+              <a:rPr lang="en-US" sz="2000" b="1" dirty="0">
+                <a:solidFill>
+                  <a:srgbClr val="2FBF71"/>
+                </a:solidFill>
+                <a:latin typeface="IBM Plex Mono" pitchFamily="34" charset="0"/>
+                <a:ea typeface="IBM Plex Mono" pitchFamily="34" charset="-122"/>
+                <a:cs typeface="IBM Plex Mono" pitchFamily="34" charset="-120"/>
+              </a:rPr>
+              <a:t>80%</a:t>
+            </a:r>
+            <a:endParaRPr lang="en-US" sz="2000" dirty="0"/>
+          </a:p>
+        </p:txBody>
+      </p:sp>
+      <p:sp>
+        <p:nvSpPr>
+          <p:cNvPr id="14" name="Text 11"/>
+          <p:cNvSpPr txBox="1"/>
+          <p:nvPr/>
+        </p:nvSpPr>
+        <p:spPr>
+          <a:xfrm>
+            <a:off x="5608320" y="5897880"/>
+            <a:ext cx="2346960" cy="256032"/>
+          </a:xfrm>
+          <a:prstGeom prst="rect">
+            <a:avLst/>
+          </a:prstGeom>
+          <a:noFill/>
+          <a:ln/>
+        </p:spPr>
+        <p:txBody>
+          <a:bodyPr wrap="square" lIns="0" tIns="0" rIns="0" bIns="0" rtlCol="0" anchor="t"/>
+          <a:lstStyle/>
+          <a:p>
+            <a:pPr indent="0" marL="0">
+              <a:buNone/>
+            </a:pPr>
+            <a:r>
+              <a:rPr lang="en-US" sz="1100" dirty="0">
+                <a:solidFill>
+                  <a:srgbClr val="8B93A1"/>
+                </a:solidFill>
+                <a:latin typeface="IBM Plex Sans" pitchFamily="34" charset="0"/>
+                <a:ea typeface="IBM Plex Sans" pitchFamily="34" charset="-122"/>
+                <a:cs typeface="IBM Plex Sans" pitchFamily="34" charset="-120"/>
+              </a:rPr>
+              <a:t>Интервал 80% на 13–15 мин</a:t>
+            </a:r>
+            <a:endParaRPr lang="en-US" sz="1100" dirty="0"/>
+          </a:p>
+        </p:txBody>
+      </p:sp>
+      <p:sp>
+        <p:nvSpPr>
+          <p:cNvPr id="15" name="Shape 12"/>
           <p:cNvSpPr/>
           <p:nvPr/>
         </p:nvSpPr>
@@ -7815,7 +8092,7 @@
       </p:sp>
       <p:sp>
         <p:nvSpPr>
-          <p:cNvPr id="10" name="Text 7"/>
+          <p:cNvPr id="16" name="Text 13"/>
           <p:cNvSpPr txBox="1"/>
           <p:nvPr/>
         </p:nvSpPr>
@@ -7854,7 +8131,7 @@
       </p:sp>
       <p:sp>
         <p:nvSpPr>
-          <p:cNvPr id="11" name="Text 8"/>
+          <p:cNvPr id="17" name="Text 14"/>
           <p:cNvSpPr txBox="1"/>
           <p:nvPr/>
         </p:nvSpPr>
@@ -7893,7 +8170,7 @@
       </p:sp>
       <p:sp>
         <p:nvSpPr>
-          <p:cNvPr id="12" name="Shape 9"/>
+          <p:cNvPr id="18" name="Shape 15"/>
           <p:cNvSpPr/>
           <p:nvPr/>
         </p:nvSpPr>
@@ -7917,7 +8194,7 @@
       </p:sp>
       <p:sp>
         <p:nvSpPr>
-          <p:cNvPr id="13" name="Shape 10"/>
+          <p:cNvPr id="19" name="Shape 16"/>
           <p:cNvSpPr/>
           <p:nvPr/>
         </p:nvSpPr>
@@ -7944,7 +8221,7 @@
       </p:sp>
       <p:sp>
         <p:nvSpPr>
-          <p:cNvPr id="14" name="Text 11"/>
+          <p:cNvPr id="20" name="Text 17"/>
           <p:cNvSpPr txBox="1"/>
           <p:nvPr/>
         </p:nvSpPr>
@@ -7983,7 +8260,7 @@
       </p:sp>
       <p:sp>
         <p:nvSpPr>
-          <p:cNvPr id="15" name="Text 12"/>
+          <p:cNvPr id="21" name="Text 18"/>
           <p:cNvSpPr txBox="1"/>
           <p:nvPr/>
         </p:nvSpPr>
@@ -8022,7 +8299,7 @@
       </p:sp>
       <p:sp>
         <p:nvSpPr>
-          <p:cNvPr id="16" name="Shape 13"/>
+          <p:cNvPr id="22" name="Shape 19"/>
           <p:cNvSpPr/>
           <p:nvPr/>
         </p:nvSpPr>
@@ -8046,7 +8323,7 @@
       </p:sp>
       <p:sp>
         <p:nvSpPr>
-          <p:cNvPr id="17" name="Shape 14"/>
+          <p:cNvPr id="23" name="Shape 20"/>
           <p:cNvSpPr/>
           <p:nvPr/>
         </p:nvSpPr>
@@ -8073,7 +8350,7 @@
       </p:sp>
       <p:sp>
         <p:nvSpPr>
-          <p:cNvPr id="18" name="Text 15"/>
+          <p:cNvPr id="24" name="Text 21"/>
           <p:cNvSpPr txBox="1"/>
           <p:nvPr/>
         </p:nvSpPr>
@@ -8112,7 +8389,7 @@
       </p:sp>
       <p:sp>
         <p:nvSpPr>
-          <p:cNvPr id="19" name="Text 16"/>
+          <p:cNvPr id="25" name="Text 22"/>
           <p:cNvSpPr txBox="1"/>
           <p:nvPr/>
         </p:nvSpPr>
@@ -8143,7 +8420,7 @@
                 <a:ea typeface="IBM Plex Sans" pitchFamily="34" charset="-122"/>
                 <a:cs typeface="IBM Plex Sans" pitchFamily="34" charset="-120"/>
               </a:rPr>
-              <a:t>задержка · P(опоздание &gt; 2 мин) · интервал 80%</a:t>
+              <a:t>задержка · калиброванная P(опоздание &gt; 2 мин) · интервал 80%</a:t>
             </a:r>
             <a:endParaRPr lang="en-US" sz="1100" dirty="0"/>
           </a:p>
@@ -8345,12 +8622,12 @@
         </p:nvSpPr>
         <p:spPr>
           <a:xfrm>
-            <a:off x="548640" y="2148840"/>
-            <a:ext cx="6035040" cy="3931920"/>
+            <a:off x="548640" y="2103120"/>
+            <a:ext cx="6035040" cy="3246120"/>
           </a:xfrm>
           <a:prstGeom prst="roundRect">
             <a:avLst>
-              <a:gd name="adj" fmla="val 1860"/>
+              <a:gd name="adj" fmla="val 2254"/>
             </a:avLst>
           </a:prstGeom>
           <a:solidFill>
@@ -8367,7 +8644,7 @@
         </p:nvSpPr>
         <p:spPr>
           <a:xfrm>
-            <a:off x="822960" y="2331720"/>
+            <a:off x="822960" y="2286000"/>
             <a:ext cx="5486400" cy="274320"/>
           </a:xfrm>
           <a:prstGeom prst="rect">
@@ -8406,8 +8683,8 @@
         </p:nvSpPr>
         <p:spPr>
           <a:xfrm>
-            <a:off x="3611880" y="2926080"/>
-            <a:ext cx="1303020" cy="2468880"/>
+            <a:off x="3611880" y="3108960"/>
+            <a:ext cx="1303020" cy="1554480"/>
           </a:xfrm>
           <a:prstGeom prst="rect">
             <a:avLst/>
@@ -8428,8 +8705,8 @@
         </p:nvSpPr>
         <p:spPr>
           <a:xfrm>
-            <a:off x="3639312" y="3395426"/>
-            <a:ext cx="205740" cy="1999534"/>
+            <a:off x="3639312" y="3436453"/>
+            <a:ext cx="205740" cy="1226987"/>
           </a:xfrm>
           <a:prstGeom prst="rect">
             <a:avLst/>
@@ -8448,8 +8725,8 @@
         </p:nvSpPr>
         <p:spPr>
           <a:xfrm>
-            <a:off x="3899916" y="3395806"/>
-            <a:ext cx="205740" cy="1999154"/>
+            <a:off x="3899916" y="3436686"/>
+            <a:ext cx="205740" cy="1226754"/>
           </a:xfrm>
           <a:prstGeom prst="rect">
             <a:avLst/>
@@ -8468,8 +8745,8 @@
         </p:nvSpPr>
         <p:spPr>
           <a:xfrm>
-            <a:off x="4160520" y="3395046"/>
-            <a:ext cx="205740" cy="1999914"/>
+            <a:off x="4160520" y="3436220"/>
+            <a:ext cx="205740" cy="1227220"/>
           </a:xfrm>
           <a:prstGeom prst="rect">
             <a:avLst/>
@@ -8488,8 +8765,8 @@
         </p:nvSpPr>
         <p:spPr>
           <a:xfrm>
-            <a:off x="4421124" y="3395806"/>
-            <a:ext cx="205740" cy="1999154"/>
+            <a:off x="4421124" y="3436686"/>
+            <a:ext cx="205740" cy="1226754"/>
           </a:xfrm>
           <a:prstGeom prst="rect">
             <a:avLst/>
@@ -8508,8 +8785,8 @@
         </p:nvSpPr>
         <p:spPr>
           <a:xfrm>
-            <a:off x="4681728" y="3396565"/>
-            <a:ext cx="205740" cy="1998395"/>
+            <a:off x="4681728" y="3437152"/>
+            <a:ext cx="205740" cy="1226288"/>
           </a:xfrm>
           <a:prstGeom prst="rect">
             <a:avLst/>
@@ -8528,7 +8805,7 @@
         </p:nvSpPr>
         <p:spPr>
           <a:xfrm>
-            <a:off x="3154680" y="2514600"/>
+            <a:off x="3154680" y="2651760"/>
             <a:ext cx="2217420" cy="457200"/>
           </a:xfrm>
           <a:prstGeom prst="rect">
@@ -8584,7 +8861,7 @@
         </p:nvSpPr>
         <p:spPr>
           <a:xfrm>
-            <a:off x="1266444" y="4983480"/>
+            <a:off x="1266444" y="4251960"/>
             <a:ext cx="2084832" cy="274320"/>
           </a:xfrm>
           <a:prstGeom prst="rect">
@@ -8623,7 +8900,7 @@
         </p:nvSpPr>
         <p:spPr>
           <a:xfrm>
-            <a:off x="5045202" y="4983480"/>
+            <a:off x="5045202" y="4251960"/>
             <a:ext cx="1172718" cy="274320"/>
           </a:xfrm>
           <a:prstGeom prst="rect">
@@ -8662,7 +8939,7 @@
         </p:nvSpPr>
         <p:spPr>
           <a:xfrm>
-            <a:off x="1005840" y="5394960"/>
+            <a:off x="1005840" y="4663440"/>
             <a:ext cx="5212080" cy="0"/>
           </a:xfrm>
           <a:prstGeom prst="line">
@@ -8685,7 +8962,7 @@
         </p:nvSpPr>
         <p:spPr>
           <a:xfrm>
-            <a:off x="731520" y="5468112"/>
+            <a:off x="731520" y="4736592"/>
             <a:ext cx="548640" cy="228600"/>
           </a:xfrm>
           <a:prstGeom prst="rect">
@@ -8724,7 +9001,7 @@
         </p:nvSpPr>
         <p:spPr>
           <a:xfrm>
-            <a:off x="2034540" y="5468112"/>
+            <a:off x="2034540" y="4736592"/>
             <a:ext cx="548640" cy="228600"/>
           </a:xfrm>
           <a:prstGeom prst="rect">
@@ -8763,7 +9040,7 @@
         </p:nvSpPr>
         <p:spPr>
           <a:xfrm>
-            <a:off x="3337560" y="5468112"/>
+            <a:off x="3337560" y="4736592"/>
             <a:ext cx="548640" cy="228600"/>
           </a:xfrm>
           <a:prstGeom prst="rect">
@@ -8802,7 +9079,7 @@
         </p:nvSpPr>
         <p:spPr>
           <a:xfrm>
-            <a:off x="4640580" y="5468112"/>
+            <a:off x="4640580" y="4736592"/>
             <a:ext cx="548640" cy="228600"/>
           </a:xfrm>
           <a:prstGeom prst="rect">
@@ -8841,7 +9118,7 @@
         </p:nvSpPr>
         <p:spPr>
           <a:xfrm>
-            <a:off x="5943600" y="5468112"/>
+            <a:off x="5943600" y="4736592"/>
             <a:ext cx="548640" cy="228600"/>
           </a:xfrm>
           <a:prstGeom prst="rect">
@@ -8880,7 +9157,7 @@
         </p:nvSpPr>
         <p:spPr>
           <a:xfrm>
-            <a:off x="1005840" y="5724144"/>
+            <a:off x="1005840" y="4992624"/>
             <a:ext cx="5212080" cy="256032"/>
           </a:xfrm>
           <a:prstGeom prst="rect">
@@ -8919,12 +9196,12 @@
         </p:nvSpPr>
         <p:spPr>
           <a:xfrm>
-            <a:off x="6858000" y="2148840"/>
-            <a:ext cx="2278228" cy="1828800"/>
+            <a:off x="6858000" y="2103120"/>
+            <a:ext cx="2278228" cy="1508760"/>
           </a:xfrm>
           <a:prstGeom prst="roundRect">
             <a:avLst>
-              <a:gd name="adj" fmla="val 4000"/>
+              <a:gd name="adj" fmla="val 4848"/>
             </a:avLst>
           </a:prstGeom>
           <a:solidFill>
@@ -8941,24 +9218,24 @@
         </p:nvSpPr>
         <p:spPr>
           <a:xfrm>
-            <a:off x="7086600" y="2331720"/>
-            <a:ext cx="1912468" cy="685800"/>
-          </a:xfrm>
-          <a:prstGeom prst="rect">
-            <a:avLst/>
-          </a:prstGeom>
-          <a:noFill/>
-          <a:ln/>
-        </p:spPr>
-        <p:txBody>
-          <a:bodyPr wrap="square" lIns="0" tIns="0" rIns="0" bIns="0" rtlCol="0" anchor="t"/>
-          <a:lstStyle/>
-          <a:p>
-            <a:pPr indent="0" marL="0">
-              <a:buNone/>
-            </a:pPr>
-            <a:r>
-              <a:rPr lang="en-US" sz="3400" b="1" dirty="0">
+            <a:off x="7086600" y="2240280"/>
+            <a:ext cx="1912468" cy="640080"/>
+          </a:xfrm>
+          <a:prstGeom prst="rect">
+            <a:avLst/>
+          </a:prstGeom>
+          <a:noFill/>
+          <a:ln/>
+        </p:spPr>
+        <p:txBody>
+          <a:bodyPr wrap="square" lIns="0" tIns="0" rIns="0" bIns="0" rtlCol="0" anchor="t"/>
+          <a:lstStyle/>
+          <a:p>
+            <a:pPr indent="0" marL="0">
+              <a:buNone/>
+            </a:pPr>
+            <a:r>
+              <a:rPr lang="en-US" sz="3200" b="1" dirty="0">
                 <a:solidFill>
                   <a:srgbClr val="E6EAF0"/>
                 </a:solidFill>
@@ -8968,7 +9245,7 @@
               </a:rPr>
               <a:t>353/353</a:t>
             </a:r>
-            <a:endParaRPr lang="en-US" sz="3400" dirty="0"/>
+            <a:endParaRPr lang="en-US" sz="3200" dirty="0"/>
           </a:p>
         </p:txBody>
       </p:sp>
@@ -8980,8 +9257,8 @@
         </p:nvSpPr>
         <p:spPr>
           <a:xfrm>
-            <a:off x="7086600" y="3063240"/>
-            <a:ext cx="1912468" cy="822960"/>
+            <a:off x="7086600" y="2907792"/>
+            <a:ext cx="1912468" cy="640080"/>
           </a:xfrm>
           <a:prstGeom prst="rect">
             <a:avLst/>
@@ -9019,12 +9296,12 @@
         </p:nvSpPr>
         <p:spPr>
           <a:xfrm>
-            <a:off x="9364828" y="2148840"/>
-            <a:ext cx="2278228" cy="1828800"/>
+            <a:off x="9364828" y="2103120"/>
+            <a:ext cx="2278228" cy="1508760"/>
           </a:xfrm>
           <a:prstGeom prst="roundRect">
             <a:avLst>
-              <a:gd name="adj" fmla="val 4000"/>
+              <a:gd name="adj" fmla="val 4848"/>
             </a:avLst>
           </a:prstGeom>
           <a:solidFill>
@@ -9041,34 +9318,34 @@
         </p:nvSpPr>
         <p:spPr>
           <a:xfrm>
-            <a:off x="9593428" y="2331720"/>
-            <a:ext cx="1912468" cy="685800"/>
-          </a:xfrm>
-          <a:prstGeom prst="rect">
-            <a:avLst/>
-          </a:prstGeom>
-          <a:noFill/>
-          <a:ln/>
-        </p:spPr>
-        <p:txBody>
-          <a:bodyPr wrap="square" lIns="0" tIns="0" rIns="0" bIns="0" rtlCol="0" anchor="t"/>
-          <a:lstStyle/>
-          <a:p>
-            <a:pPr indent="0" marL="0">
-              <a:buNone/>
-            </a:pPr>
-            <a:r>
-              <a:rPr lang="en-US" sz="3400" b="1" dirty="0">
-                <a:solidFill>
-                  <a:srgbClr val="E6EAF0"/>
-                </a:solidFill>
-                <a:latin typeface="IBM Plex Sans" pitchFamily="34" charset="0"/>
-                <a:ea typeface="IBM Plex Sans" pitchFamily="34" charset="-122"/>
-                <a:cs typeface="IBM Plex Sans" pitchFamily="34" charset="-120"/>
-              </a:rPr>
-              <a:t>100%</a:t>
-            </a:r>
-            <a:endParaRPr lang="en-US" sz="3400" dirty="0"/>
+            <a:off x="9593428" y="2240280"/>
+            <a:ext cx="1912468" cy="640080"/>
+          </a:xfrm>
+          <a:prstGeom prst="rect">
+            <a:avLst/>
+          </a:prstGeom>
+          <a:noFill/>
+          <a:ln/>
+        </p:spPr>
+        <p:txBody>
+          <a:bodyPr wrap="square" lIns="0" tIns="0" rIns="0" bIns="0" rtlCol="0" anchor="t"/>
+          <a:lstStyle/>
+          <a:p>
+            <a:pPr indent="0" marL="0">
+              <a:buNone/>
+            </a:pPr>
+            <a:r>
+              <a:rPr lang="en-US" sz="3200" b="1" dirty="0">
+                <a:solidFill>
+                  <a:srgbClr val="F2B134"/>
+                </a:solidFill>
+                <a:latin typeface="IBM Plex Sans" pitchFamily="34" charset="0"/>
+                <a:ea typeface="IBM Plex Sans" pitchFamily="34" charset="-122"/>
+                <a:cs typeface="IBM Plex Sans" pitchFamily="34" charset="-120"/>
+              </a:rPr>
+              <a:t>0.86</a:t>
+            </a:r>
+            <a:endParaRPr lang="en-US" sz="3200" dirty="0"/>
           </a:p>
         </p:txBody>
       </p:sp>
@@ -9080,8 +9357,8 @@
         </p:nvSpPr>
         <p:spPr>
           <a:xfrm>
-            <a:off x="9593428" y="3063240"/>
-            <a:ext cx="1912468" cy="822960"/>
+            <a:off x="9593428" y="2907792"/>
+            <a:ext cx="1912468" cy="640080"/>
           </a:xfrm>
           <a:prstGeom prst="rect">
             <a:avLst/>
@@ -9105,7 +9382,7 @@
                 <a:ea typeface="IBM Plex Sans" pitchFamily="34" charset="-122"/>
                 <a:cs typeface="IBM Plex Sans" pitchFamily="34" charset="-120"/>
               </a:rPr>
-              <a:t>алертов с упреждением ≥ 10 мин (241 из 241)</a:t>
+              <a:t>алертов на ТС·ч, честно (было 1.24); точность 41% → 49%</a:t>
             </a:r>
             <a:endParaRPr lang="en-US" sz="1200" dirty="0"/>
           </a:p>
@@ -9119,12 +9396,12 @@
         </p:nvSpPr>
         <p:spPr>
           <a:xfrm>
-            <a:off x="6858000" y="4251960"/>
-            <a:ext cx="2278228" cy="1828800"/>
+            <a:off x="6858000" y="3840480"/>
+            <a:ext cx="2278228" cy="1508760"/>
           </a:xfrm>
           <a:prstGeom prst="roundRect">
             <a:avLst>
-              <a:gd name="adj" fmla="val 4000"/>
+              <a:gd name="adj" fmla="val 4848"/>
             </a:avLst>
           </a:prstGeom>
           <a:solidFill>
@@ -9141,24 +9418,24 @@
         </p:nvSpPr>
         <p:spPr>
           <a:xfrm>
-            <a:off x="7086600" y="4434840"/>
-            <a:ext cx="1912468" cy="685800"/>
-          </a:xfrm>
-          <a:prstGeom prst="rect">
-            <a:avLst/>
-          </a:prstGeom>
-          <a:noFill/>
-          <a:ln/>
-        </p:spPr>
-        <p:txBody>
-          <a:bodyPr wrap="square" lIns="0" tIns="0" rIns="0" bIns="0" rtlCol="0" anchor="t"/>
-          <a:lstStyle/>
-          <a:p>
-            <a:pPr indent="0" marL="0">
-              <a:buNone/>
-            </a:pPr>
-            <a:r>
-              <a:rPr lang="en-US" sz="3400" b="1" dirty="0">
+            <a:off x="7086600" y="3977640"/>
+            <a:ext cx="1912468" cy="640080"/>
+          </a:xfrm>
+          <a:prstGeom prst="rect">
+            <a:avLst/>
+          </a:prstGeom>
+          <a:noFill/>
+          <a:ln/>
+        </p:spPr>
+        <p:txBody>
+          <a:bodyPr wrap="square" lIns="0" tIns="0" rIns="0" bIns="0" rtlCol="0" anchor="t"/>
+          <a:lstStyle/>
+          <a:p>
+            <a:pPr indent="0" marL="0">
+              <a:buNone/>
+            </a:pPr>
+            <a:r>
+              <a:rPr lang="en-US" sz="3200" b="1" dirty="0">
                 <a:solidFill>
                   <a:srgbClr val="E6EAF0"/>
                 </a:solidFill>
@@ -9168,7 +9445,7 @@
               </a:rPr>
               <a:t>0.03 с</a:t>
             </a:r>
-            <a:endParaRPr lang="en-US" sz="3400" dirty="0"/>
+            <a:endParaRPr lang="en-US" sz="3200" dirty="0"/>
           </a:p>
         </p:txBody>
       </p:sp>
@@ -9180,8 +9457,8 @@
         </p:nvSpPr>
         <p:spPr>
           <a:xfrm>
-            <a:off x="7086600" y="5166360"/>
-            <a:ext cx="1912468" cy="822960"/>
+            <a:off x="7086600" y="4645152"/>
+            <a:ext cx="1912468" cy="640080"/>
           </a:xfrm>
           <a:prstGeom prst="rect">
             <a:avLst/>
@@ -9219,12 +9496,12 @@
         </p:nvSpPr>
         <p:spPr>
           <a:xfrm>
-            <a:off x="9364828" y="4251960"/>
-            <a:ext cx="2278228" cy="1828800"/>
+            <a:off x="9364828" y="3840480"/>
+            <a:ext cx="2278228" cy="1508760"/>
           </a:xfrm>
           <a:prstGeom prst="roundRect">
             <a:avLst>
-              <a:gd name="adj" fmla="val 4000"/>
+              <a:gd name="adj" fmla="val 4848"/>
             </a:avLst>
           </a:prstGeom>
           <a:solidFill>
@@ -9241,24 +9518,24 @@
         </p:nvSpPr>
         <p:spPr>
           <a:xfrm>
-            <a:off x="9593428" y="4434840"/>
-            <a:ext cx="1912468" cy="685800"/>
-          </a:xfrm>
-          <a:prstGeom prst="rect">
-            <a:avLst/>
-          </a:prstGeom>
-          <a:noFill/>
-          <a:ln/>
-        </p:spPr>
-        <p:txBody>
-          <a:bodyPr wrap="square" lIns="0" tIns="0" rIns="0" bIns="0" rtlCol="0" anchor="t"/>
-          <a:lstStyle/>
-          <a:p>
-            <a:pPr indent="0" marL="0">
-              <a:buNone/>
-            </a:pPr>
-            <a:r>
-              <a:rPr lang="en-US" sz="3400" b="1" dirty="0">
+            <a:off x="9593428" y="3977640"/>
+            <a:ext cx="1912468" cy="640080"/>
+          </a:xfrm>
+          <a:prstGeom prst="rect">
+            <a:avLst/>
+          </a:prstGeom>
+          <a:noFill/>
+          <a:ln/>
+        </p:spPr>
+        <p:txBody>
+          <a:bodyPr wrap="square" lIns="0" tIns="0" rIns="0" bIns="0" rtlCol="0" anchor="t"/>
+          <a:lstStyle/>
+          <a:p>
+            <a:pPr indent="0" marL="0">
+              <a:buNone/>
+            </a:pPr>
+            <a:r>
+              <a:rPr lang="en-US" sz="3200" b="1" dirty="0">
                 <a:solidFill>
                   <a:srgbClr val="2FBF71"/>
                 </a:solidFill>
@@ -9268,7 +9545,7 @@
               </a:rPr>
               <a:t>78 с</a:t>
             </a:r>
-            <a:endParaRPr lang="en-US" sz="3400" dirty="0"/>
+            <a:endParaRPr lang="en-US" sz="3200" dirty="0"/>
           </a:p>
         </p:txBody>
       </p:sp>
@@ -9280,8 +9557,8 @@
         </p:nvSpPr>
         <p:spPr>
           <a:xfrm>
-            <a:off x="9593428" y="5166360"/>
-            <a:ext cx="1912468" cy="822960"/>
+            <a:off x="9593428" y="4645152"/>
+            <a:ext cx="1912468" cy="640080"/>
           </a:xfrm>
           <a:prstGeom prst="rect">
             <a:avLst/>
@@ -9305,9 +9582,103 @@
                 <a:ea typeface="IBM Plex Sans" pitchFamily="34" charset="-122"/>
                 <a:cs typeface="IBM Plex Sans" pitchFamily="34" charset="-120"/>
               </a:rPr>
-              <a:t>MAE на потоке против 93 у подсказки организаторов и 117 онлайн</a:t>
+              <a:t>MAE на потоке против 93 у подсказки организаторов</a:t>
             </a:r>
             <a:endParaRPr lang="en-US" sz="1200" dirty="0"/>
+          </a:p>
+        </p:txBody>
+      </p:sp>
+      <p:sp>
+        <p:nvSpPr>
+          <p:cNvPr id="36" name="Shape 34"/>
+          <p:cNvSpPr/>
+          <p:nvPr/>
+        </p:nvSpPr>
+        <p:spPr>
+          <a:xfrm>
+            <a:off x="548640" y="5532120"/>
+            <a:ext cx="11094415" cy="731520"/>
+          </a:xfrm>
+          <a:prstGeom prst="roundRect">
+            <a:avLst>
+              <a:gd name="adj" fmla="val 10000"/>
+            </a:avLst>
+          </a:prstGeom>
+          <a:solidFill>
+            <a:srgbClr val="1C2330"/>
+          </a:solidFill>
+          <a:ln w="12700">
+            <a:solidFill>
+              <a:srgbClr val="2A3342"/>
+            </a:solidFill>
+            <a:prstDash val="solid"/>
+          </a:ln>
+        </p:spPr>
+      </p:sp>
+      <p:sp>
+        <p:nvSpPr>
+          <p:cNvPr id="37" name="Text 35"/>
+          <p:cNvSpPr txBox="1"/>
+          <p:nvPr/>
+        </p:nvSpPr>
+        <p:spPr>
+          <a:xfrm>
+            <a:off x="822960" y="5532120"/>
+            <a:ext cx="10545775" cy="731520"/>
+          </a:xfrm>
+          <a:prstGeom prst="rect">
+            <a:avLst/>
+          </a:prstGeom>
+          <a:noFill/>
+          <a:ln/>
+        </p:spPr>
+        <p:txBody>
+          <a:bodyPr wrap="square" lIns="0" tIns="0" rIns="0" bIns="0" rtlCol="0" anchor="ctr"/>
+          <a:lstStyle/>
+          <a:p>
+            <a:pPr indent="0" marL="0">
+              <a:buNone/>
+            </a:pPr>
+            <a:r>
+              <a:rPr lang="en-US" sz="1300" b="1" dirty="0">
+                <a:solidFill>
+                  <a:srgbClr val="E6EAF0"/>
+                </a:solidFill>
+                <a:latin typeface="IBM Plex Sans" pitchFamily="34" charset="0"/>
+                <a:ea typeface="IBM Plex Sans" pitchFamily="34" charset="-122"/>
+                <a:cs typeface="IBM Plex Sans" pitchFamily="34" charset="-120"/>
+              </a:rPr>
+              <a:t>Алерт — </a:t>
+            </a:r>
+            <a:pPr indent="0" marL="0">
+              <a:buNone/>
+            </a:pPr>
+            <a:r>
+              <a:rPr lang="en-US" sz="1300" dirty="0">
+                <a:solidFill>
+                  <a:srgbClr val="8B93A1"/>
+                </a:solidFill>
+                <a:latin typeface="IBM Plex Sans" pitchFamily="34" charset="0"/>
+                <a:ea typeface="IBM Plex Sans" pitchFamily="34" charset="-122"/>
+                <a:cs typeface="IBM Plex Sans" pitchFamily="34" charset="-120"/>
+              </a:rPr>
+              <a:t>3 прохода подряд с прогнозом &gt; 2 мин или калиброванной P ≥ 0.5.  </a:t>
+            </a:r>
+            <a:pPr indent="0" marL="0">
+              <a:buNone/>
+            </a:pPr>
+            <a:r>
+              <a:rPr lang="en-US" sz="1300" dirty="0">
+                <a:solidFill>
+                  <a:srgbClr val="E6EAF0"/>
+                </a:solidFill>
+                <a:latin typeface="IBM Plex Sans" pitchFamily="34" charset="0"/>
+                <a:ea typeface="IBM Plex Sans" pitchFamily="34" charset="-122"/>
+                <a:cs typeface="IBM Plex Sans" pitchFamily="34" charset="-120"/>
+              </a:rPr>
+              <a:t>162 инцидента за день · 96% опоздавших рейсов с алертом · 100% за ≥ 10 мин</a:t>
+            </a:r>
+            <a:endParaRPr lang="en-US" sz="1300" dirty="0"/>
           </a:p>
         </p:txBody>
       </p:sp>
@@ -10110,12 +10481,12 @@
         </p:nvSpPr>
         <p:spPr>
           <a:xfrm>
-            <a:off x="5479999" y="1883664"/>
-            <a:ext cx="6199632" cy="3542740"/>
+            <a:off x="6532110" y="1883664"/>
+            <a:ext cx="5147521" cy="4370832"/>
           </a:xfrm>
           <a:prstGeom prst="roundRect">
             <a:avLst>
-              <a:gd name="adj" fmla="val 1549"/>
+              <a:gd name="adj" fmla="val 1255"/>
             </a:avLst>
           </a:prstGeom>
           <a:solidFill>
@@ -10147,8 +10518,8 @@
         </p:blipFill>
         <p:spPr>
           <a:xfrm>
-            <a:off x="5516575" y="1920240"/>
-            <a:ext cx="6126480" cy="3469588"/>
+            <a:off x="6568686" y="1920240"/>
+            <a:ext cx="5074369" cy="4297680"/>
           </a:xfrm>
           <a:prstGeom prst="rect">
             <a:avLst/>
@@ -10163,8 +10534,8 @@
         </p:nvSpPr>
         <p:spPr>
           <a:xfrm>
-            <a:off x="5516575" y="5499556"/>
-            <a:ext cx="6126480" cy="274320"/>
+            <a:off x="6568686" y="6327648"/>
+            <a:ext cx="5074369" cy="274320"/>
           </a:xfrm>
           <a:prstGeom prst="rect">
             <a:avLst/>
@@ -10188,7 +10559,7 @@
                 <a:ea typeface="IBM Plex Sans" pitchFamily="34" charset="-122"/>
                 <a:cs typeface="IBM Plex Sans" pitchFamily="34" charset="-120"/>
               </a:rPr>
-              <a:t>Панель «Система» на живом стеке: 0 потерь, 0 ошибок CRC, 100% алертов за ≥ 10 мин</a:t>
+              <a:t>Панель «Система», живой стек: правило алерта, Brier 0.15 → 0.14, 0 потерь</a:t>
             </a:r>
             <a:endParaRPr lang="en-US" sz="1000" dirty="0"/>
           </a:p>
@@ -10203,7 +10574,7 @@
         <p:spPr>
           <a:xfrm>
             <a:off x="548640" y="1920240"/>
-            <a:ext cx="2141068" cy="685800"/>
+            <a:ext cx="2667123" cy="685800"/>
           </a:xfrm>
           <a:prstGeom prst="rect">
             <a:avLst/>
@@ -10242,7 +10613,7 @@
         <p:spPr>
           <a:xfrm>
             <a:off x="548640" y="2633472"/>
-            <a:ext cx="2141068" cy="411480"/>
+            <a:ext cx="2667123" cy="411480"/>
           </a:xfrm>
           <a:prstGeom prst="rect">
             <a:avLst/>
@@ -10266,7 +10637,7 @@
                 <a:ea typeface="IBM Plex Sans" pitchFamily="34" charset="-122"/>
                 <a:cs typeface="IBM Plex Sans" pitchFamily="34" charset="-120"/>
               </a:rPr>
-              <a:t>инференс ML, батч 30 ТС</a:t>
+              <a:t>инференс, батч 30 ТС; батч ML на потоке 54 мс</a:t>
             </a:r>
             <a:endParaRPr lang="en-US" sz="1200" dirty="0"/>
           </a:p>
@@ -10280,8 +10651,8 @@
         </p:nvSpPr>
         <p:spPr>
           <a:xfrm>
-            <a:off x="2964028" y="1920240"/>
-            <a:ext cx="2141068" cy="685800"/>
+            <a:off x="3490083" y="1920240"/>
+            <a:ext cx="2667123" cy="685800"/>
           </a:xfrm>
           <a:prstGeom prst="rect">
             <a:avLst/>
@@ -10319,8 +10690,8 @@
         </p:nvSpPr>
         <p:spPr>
           <a:xfrm>
-            <a:off x="2964028" y="2633472"/>
-            <a:ext cx="2141068" cy="411480"/>
+            <a:off x="3490083" y="2633472"/>
+            <a:ext cx="2667123" cy="411480"/>
           </a:xfrm>
           <a:prstGeom prst="rect">
             <a:avLst/>
@@ -10344,7 +10715,7 @@
                 <a:ea typeface="IBM Plex Sans" pitchFamily="34" charset="-122"/>
                 <a:cs typeface="IBM Plex Sans" pitchFamily="34" charset="-120"/>
               </a:rPr>
-              <a:t>пакет → дашборд, p95</a:t>
+              <a:t>пакет → дашборд, p95; прогнозы → WS 238 мс</a:t>
             </a:r>
             <a:endParaRPr lang="en-US" sz="1200" dirty="0"/>
           </a:p>
@@ -10359,7 +10730,7 @@
         <p:spPr>
           <a:xfrm>
             <a:off x="548640" y="3200400"/>
-            <a:ext cx="2141068" cy="685800"/>
+            <a:ext cx="2667123" cy="685800"/>
           </a:xfrm>
           <a:prstGeom prst="rect">
             <a:avLst/>
@@ -10398,7 +10769,7 @@
         <p:spPr>
           <a:xfrm>
             <a:off x="548640" y="3913632"/>
-            <a:ext cx="2141068" cy="411480"/>
+            <a:ext cx="2667123" cy="411480"/>
           </a:xfrm>
           <a:prstGeom prst="rect">
             <a:avLst/>
@@ -10436,8 +10807,8 @@
         </p:nvSpPr>
         <p:spPr>
           <a:xfrm>
-            <a:off x="2964028" y="3200400"/>
-            <a:ext cx="2141068" cy="685800"/>
+            <a:off x="3490083" y="3200400"/>
+            <a:ext cx="2667123" cy="685800"/>
           </a:xfrm>
           <a:prstGeom prst="rect">
             <a:avLst/>
@@ -10475,8 +10846,8 @@
         </p:nvSpPr>
         <p:spPr>
           <a:xfrm>
-            <a:off x="2964028" y="3913632"/>
-            <a:ext cx="2141068" cy="411480"/>
+            <a:off x="3490083" y="3913632"/>
+            <a:ext cx="2667123" cy="411480"/>
           </a:xfrm>
           <a:prstGeom prst="rect">
             <a:avLst/>
@@ -10620,7 +10991,7 @@
         <p:spPr>
           <a:xfrm>
             <a:off x="1920240" y="4800600"/>
-            <a:ext cx="3184855" cy="457200"/>
+            <a:ext cx="4236966" cy="457200"/>
           </a:xfrm>
           <a:prstGeom prst="rect">
             <a:avLst/>
@@ -10739,7 +11110,7 @@
         <p:spPr>
           <a:xfrm>
             <a:off x="1920240" y="5349240"/>
-            <a:ext cx="3184855" cy="457200"/>
+            <a:ext cx="4236966" cy="457200"/>
           </a:xfrm>
           <a:prstGeom prst="rect">
             <a:avLst/>
@@ -10858,7 +11229,7 @@
         <p:spPr>
           <a:xfrm>
             <a:off x="1920240" y="5897880"/>
-            <a:ext cx="3184855" cy="457200"/>
+            <a:ext cx="4236966" cy="457200"/>
           </a:xfrm>
           <a:prstGeom prst="rect">
             <a:avLst/>
@@ -11082,11 +11453,11 @@
         <p:spPr>
           <a:xfrm>
             <a:off x="548640" y="2011680"/>
-            <a:ext cx="3931920" cy="4114800"/>
+            <a:ext cx="3931920" cy="3611880"/>
           </a:xfrm>
           <a:prstGeom prst="roundRect">
             <a:avLst>
-              <a:gd name="adj" fmla="val 1860"/>
+              <a:gd name="adj" fmla="val 2025"/>
             </a:avLst>
           </a:prstGeom>
           <a:solidFill>
@@ -11142,24 +11513,24 @@
         </p:nvSpPr>
         <p:spPr>
           <a:xfrm>
-            <a:off x="822960" y="2743200"/>
-            <a:ext cx="3383280" cy="1280160"/>
-          </a:xfrm>
-          <a:prstGeom prst="rect">
-            <a:avLst/>
-          </a:prstGeom>
-          <a:noFill/>
-          <a:ln/>
-        </p:spPr>
-        <p:txBody>
-          <a:bodyPr wrap="square" lIns="0" tIns="0" rIns="0" bIns="0" rtlCol="0" anchor="t"/>
-          <a:lstStyle/>
-          <a:p>
-            <a:pPr indent="0" marL="0">
-              <a:buNone/>
-            </a:pPr>
-            <a:r>
-              <a:rPr lang="en-US" sz="8800" b="1" dirty="0">
+            <a:off x="822960" y="2651760"/>
+            <a:ext cx="3383280" cy="1051560"/>
+          </a:xfrm>
+          <a:prstGeom prst="rect">
+            <a:avLst/>
+          </a:prstGeom>
+          <a:noFill/>
+          <a:ln/>
+        </p:spPr>
+        <p:txBody>
+          <a:bodyPr wrap="square" lIns="0" tIns="0" rIns="0" bIns="0" rtlCol="0" anchor="t"/>
+          <a:lstStyle/>
+          <a:p>
+            <a:pPr indent="0" marL="0">
+              <a:buNone/>
+            </a:pPr>
+            <a:r>
+              <a:rPr lang="en-US" sz="7200" b="1" dirty="0">
                 <a:solidFill>
                   <a:srgbClr val="3E9BFF"/>
                 </a:solidFill>
@@ -11169,7 +11540,7 @@
               </a:rPr>
               <a:t>1.9×</a:t>
             </a:r>
-            <a:endParaRPr lang="en-US" sz="8800" dirty="0"/>
+            <a:endParaRPr lang="en-US" sz="7200" dirty="0"/>
           </a:p>
         </p:txBody>
       </p:sp>
@@ -11181,7 +11552,7 @@
         </p:nvSpPr>
         <p:spPr>
           <a:xfrm>
-            <a:off x="822960" y="4160520"/>
+            <a:off x="822960" y="3794760"/>
             <a:ext cx="3383280" cy="822960"/>
           </a:xfrm>
           <a:prstGeom prst="rect">
@@ -11220,8 +11591,8 @@
         </p:nvSpPr>
         <p:spPr>
           <a:xfrm>
-            <a:off x="822960" y="5120640"/>
-            <a:ext cx="3383280" cy="731520"/>
+            <a:off x="822960" y="4709160"/>
+            <a:ext cx="3383280" cy="640080"/>
           </a:xfrm>
           <a:prstGeom prst="rect">
             <a:avLst/>
@@ -11260,11 +11631,11 @@
         <p:spPr>
           <a:xfrm>
             <a:off x="4709160" y="2011680"/>
-            <a:ext cx="3352648" cy="1219200"/>
+            <a:ext cx="3352648" cy="1051560"/>
           </a:xfrm>
           <a:prstGeom prst="roundRect">
             <a:avLst>
-              <a:gd name="adj" fmla="val 6000"/>
+              <a:gd name="adj" fmla="val 6957"/>
             </a:avLst>
           </a:prstGeom>
           <a:solidFill>
@@ -11281,7 +11652,7 @@
         </p:nvSpPr>
         <p:spPr>
           <a:xfrm>
-            <a:off x="4937760" y="2176272"/>
+            <a:off x="4937760" y="2139696"/>
             <a:ext cx="2895448" cy="320040"/>
           </a:xfrm>
           <a:prstGeom prst="rect">
@@ -11320,8 +11691,8 @@
         </p:nvSpPr>
         <p:spPr>
           <a:xfrm>
-            <a:off x="4937760" y="2542032"/>
-            <a:ext cx="2895448" cy="579120"/>
+            <a:off x="4937760" y="2468880"/>
+            <a:ext cx="2895448" cy="548640"/>
           </a:xfrm>
           <a:prstGeom prst="rect">
             <a:avLst/>
@@ -11360,11 +11731,11 @@
         <p:spPr>
           <a:xfrm>
             <a:off x="8290408" y="2011680"/>
-            <a:ext cx="3352648" cy="1219200"/>
+            <a:ext cx="3352648" cy="1051560"/>
           </a:xfrm>
           <a:prstGeom prst="roundRect">
             <a:avLst>
-              <a:gd name="adj" fmla="val 6000"/>
+              <a:gd name="adj" fmla="val 6957"/>
             </a:avLst>
           </a:prstGeom>
           <a:solidFill>
@@ -11381,7 +11752,7 @@
         </p:nvSpPr>
         <p:spPr>
           <a:xfrm>
-            <a:off x="8519008" y="2176272"/>
+            <a:off x="8519008" y="2139696"/>
             <a:ext cx="2895448" cy="320040"/>
           </a:xfrm>
           <a:prstGeom prst="rect">
@@ -11420,8 +11791,8 @@
         </p:nvSpPr>
         <p:spPr>
           <a:xfrm>
-            <a:off x="8519008" y="2542032"/>
-            <a:ext cx="2895448" cy="579120"/>
+            <a:off x="8519008" y="2468880"/>
+            <a:ext cx="2895448" cy="548640"/>
           </a:xfrm>
           <a:prstGeom prst="rect">
             <a:avLst/>
@@ -11459,12 +11830,12 @@
         </p:nvSpPr>
         <p:spPr>
           <a:xfrm>
-            <a:off x="4709160" y="3459480"/>
-            <a:ext cx="3352648" cy="1219200"/>
+            <a:off x="4709160" y="3291840"/>
+            <a:ext cx="3352648" cy="1051560"/>
           </a:xfrm>
           <a:prstGeom prst="roundRect">
             <a:avLst>
-              <a:gd name="adj" fmla="val 6000"/>
+              <a:gd name="adj" fmla="val 6957"/>
             </a:avLst>
           </a:prstGeom>
           <a:solidFill>
@@ -11481,7 +11852,7 @@
         </p:nvSpPr>
         <p:spPr>
           <a:xfrm>
-            <a:off x="4937760" y="3624072"/>
+            <a:off x="4937760" y="3419856"/>
             <a:ext cx="2895448" cy="320040"/>
           </a:xfrm>
           <a:prstGeom prst="rect">
@@ -11520,8 +11891,8 @@
         </p:nvSpPr>
         <p:spPr>
           <a:xfrm>
-            <a:off x="4937760" y="3989832"/>
-            <a:ext cx="2895448" cy="579120"/>
+            <a:off x="4937760" y="3749040"/>
+            <a:ext cx="2895448" cy="548640"/>
           </a:xfrm>
           <a:prstGeom prst="rect">
             <a:avLst/>
@@ -11559,12 +11930,12 @@
         </p:nvSpPr>
         <p:spPr>
           <a:xfrm>
-            <a:off x="8290408" y="3459480"/>
-            <a:ext cx="3352648" cy="1219200"/>
+            <a:off x="8290408" y="3291840"/>
+            <a:ext cx="3352648" cy="1051560"/>
           </a:xfrm>
           <a:prstGeom prst="roundRect">
             <a:avLst>
-              <a:gd name="adj" fmla="val 6000"/>
+              <a:gd name="adj" fmla="val 6957"/>
             </a:avLst>
           </a:prstGeom>
           <a:solidFill>
@@ -11581,7 +11952,7 @@
         </p:nvSpPr>
         <p:spPr>
           <a:xfrm>
-            <a:off x="8519008" y="3624072"/>
+            <a:off x="8519008" y="3419856"/>
             <a:ext cx="2895448" cy="320040"/>
           </a:xfrm>
           <a:prstGeom prst="rect">
@@ -11620,8 +11991,8 @@
         </p:nvSpPr>
         <p:spPr>
           <a:xfrm>
-            <a:off x="8519008" y="3989832"/>
-            <a:ext cx="2895448" cy="579120"/>
+            <a:off x="8519008" y="3749040"/>
+            <a:ext cx="2895448" cy="548640"/>
           </a:xfrm>
           <a:prstGeom prst="rect">
             <a:avLst/>
@@ -11659,12 +12030,12 @@
         </p:nvSpPr>
         <p:spPr>
           <a:xfrm>
-            <a:off x="4709160" y="4907280"/>
-            <a:ext cx="3352648" cy="1219200"/>
+            <a:off x="4709160" y="4572000"/>
+            <a:ext cx="3352648" cy="1051560"/>
           </a:xfrm>
           <a:prstGeom prst="roundRect">
             <a:avLst>
-              <a:gd name="adj" fmla="val 6000"/>
+              <a:gd name="adj" fmla="val 6957"/>
             </a:avLst>
           </a:prstGeom>
           <a:solidFill>
@@ -11681,7 +12052,7 @@
         </p:nvSpPr>
         <p:spPr>
           <a:xfrm>
-            <a:off x="4937760" y="5071872"/>
+            <a:off x="4937760" y="4700016"/>
             <a:ext cx="2895448" cy="320040"/>
           </a:xfrm>
           <a:prstGeom prst="rect">
@@ -11720,8 +12091,8 @@
         </p:nvSpPr>
         <p:spPr>
           <a:xfrm>
-            <a:off x="4937760" y="5437632"/>
-            <a:ext cx="2895448" cy="579120"/>
+            <a:off x="4937760" y="5029200"/>
+            <a:ext cx="2895448" cy="548640"/>
           </a:xfrm>
           <a:prstGeom prst="rect">
             <a:avLst/>
@@ -11759,12 +12130,12 @@
         </p:nvSpPr>
         <p:spPr>
           <a:xfrm>
-            <a:off x="8290408" y="4907280"/>
-            <a:ext cx="3352648" cy="1219200"/>
+            <a:off x="8290408" y="4572000"/>
+            <a:ext cx="3352648" cy="1051560"/>
           </a:xfrm>
           <a:prstGeom prst="roundRect">
             <a:avLst>
-              <a:gd name="adj" fmla="val 6000"/>
+              <a:gd name="adj" fmla="val 6957"/>
             </a:avLst>
           </a:prstGeom>
           <a:solidFill>
@@ -11781,7 +12152,7 @@
         </p:nvSpPr>
         <p:spPr>
           <a:xfrm>
-            <a:off x="8519008" y="5071872"/>
+            <a:off x="8519008" y="4700016"/>
             <a:ext cx="2895448" cy="320040"/>
           </a:xfrm>
           <a:prstGeom prst="rect">
@@ -11820,8 +12191,8 @@
         </p:nvSpPr>
         <p:spPr>
           <a:xfrm>
-            <a:off x="8519008" y="5437632"/>
-            <a:ext cx="2895448" cy="579120"/>
+            <a:off x="8519008" y="5029200"/>
+            <a:ext cx="2895448" cy="548640"/>
           </a:xfrm>
           <a:prstGeom prst="rect">
             <a:avLst/>
@@ -11845,9 +12216,89 @@
                 <a:ea typeface="IBM Plex Sans" pitchFamily="34" charset="-122"/>
                 <a:cs typeface="IBM Plex Sans" pitchFamily="34" charset="-120"/>
               </a:rPr>
-              <a:t>график отклонения и остановки ±60 мин; латентности, приём NDTP, пакет в hex</a:t>
+              <a:t>график отклонения, остановки ±60 мин, латентности, пакет в hex</a:t>
             </a:r>
             <a:endParaRPr lang="en-US" sz="1200" dirty="0"/>
+          </a:p>
+        </p:txBody>
+      </p:sp>
+      <p:sp>
+        <p:nvSpPr>
+          <p:cNvPr id="29" name="Shape 27"/>
+          <p:cNvSpPr/>
+          <p:nvPr/>
+        </p:nvSpPr>
+        <p:spPr>
+          <a:xfrm>
+            <a:off x="548640" y="5852160"/>
+            <a:ext cx="11094415" cy="640080"/>
+          </a:xfrm>
+          <a:prstGeom prst="roundRect">
+            <a:avLst>
+              <a:gd name="adj" fmla="val 11429"/>
+            </a:avLst>
+          </a:prstGeom>
+          <a:solidFill>
+            <a:srgbClr val="0E1116"/>
+          </a:solidFill>
+          <a:ln w="12700">
+            <a:solidFill>
+              <a:srgbClr val="2A3342"/>
+            </a:solidFill>
+            <a:prstDash val="dash"/>
+          </a:ln>
+        </p:spPr>
+      </p:sp>
+      <p:sp>
+        <p:nvSpPr>
+          <p:cNvPr id="30" name="Text 28"/>
+          <p:cNvSpPr txBox="1"/>
+          <p:nvPr/>
+        </p:nvSpPr>
+        <p:spPr>
+          <a:xfrm>
+            <a:off x="822960" y="5852160"/>
+            <a:ext cx="10545775" cy="640080"/>
+          </a:xfrm>
+          <a:prstGeom prst="rect">
+            <a:avLst/>
+          </a:prstGeom>
+          <a:noFill/>
+          <a:ln/>
+        </p:spPr>
+        <p:txBody>
+          <a:bodyPr wrap="square" lIns="0" tIns="0" rIns="0" bIns="0" rtlCol="0" anchor="ctr"/>
+          <a:lstStyle/>
+          <a:p>
+            <a:pPr indent="0" marL="0">
+              <a:buNone/>
+            </a:pPr>
+            <a:r>
+              <a:rPr lang="en-US" sz="1300" b="1" dirty="0">
+                <a:solidFill>
+                  <a:srgbClr val="F2B134"/>
+                </a:solidFill>
+                <a:latin typeface="IBM Plex Sans" pitchFamily="34" charset="0"/>
+                <a:ea typeface="IBM Plex Sans" pitchFamily="34" charset="-122"/>
+                <a:cs typeface="IBM Plex Sans" pitchFamily="34" charset="-120"/>
+              </a:rPr>
+              <a:t>Проверили и отбросили: </a:t>
+            </a:r>
+            <a:pPr indent="0" marL="0">
+              <a:buNone/>
+            </a:pPr>
+            <a:r>
+              <a:rPr lang="en-US" sz="1300" dirty="0">
+                <a:solidFill>
+                  <a:srgbClr val="8B93A1"/>
+                </a:solidFill>
+                <a:latin typeface="IBM Plex Sans" pitchFamily="34" charset="0"/>
+                <a:ea typeface="IBM Plex Sans" pitchFamily="34" charset="-122"/>
+                <a:cs typeface="IBM Plex Sans" pitchFamily="34" charset="-120"/>
+              </a:rPr>
+              <a:t>отклонение по нитке как признак модели — −1.3 с MAE, ниже порога внедрения 2 с;  GRU в ансамбле — всего −0.2 с, так и говорим</a:t>
+            </a:r>
+            <a:endParaRPr lang="en-US" sz="1300" dirty="0"/>
           </a:p>
         </p:txBody>
       </p:sp>

--- a/docs/pitch/transit-pulse-pitch.pptx
+++ b/docs/pitch/transit-pulse-pitch.pptx
@@ -952,7 +952,7 @@
           <a:p>
             <a:r>
               <a:rPr lang="en-US" dirty="0"/>
-              <a:t>[~35 с] Прежде чем строить модель, мы проверили данные и нашли утечку ответа: факт прибытия по всем 151 целевой остановке validate лежит в расписании test и train. С ней ошибка была бы почти нулевой. Мы её не используем — колонка факта физически не попадает в признаки, это проверяет тест. Ещё две находки: синтетические автобусы — клоны реальных, поэтому кросс-валидацию считаем с защитой от клонов. А маршруты почти не пересекаются — 5 общих остановок из 847, поэтому сетевых признаков мы честно не строим.</a:t>
+              <a:t>[~35 с] Прежде чем строить модель, мы проверили данные и нашли утечку ответа: факт прибытия по всем 151 целевой остановке validate лежит в расписании test и train. С ней ошибка была бы почти нулевой. Мы её не используем — колонка факта физически не попадает в признаки, это проверяет тест; по факту мы только один раз оценили шкалу метрики. Ещё две находки: синтетические автобусы — клоны реальных, в том числе в моменты validate, поэтому кросс-валидацию считаем с защитой от клонов, а отдельный сабмит обучили без этих копий — он тоже дал 1.0. А маршруты почти не пересекаются — 5 общих остановок из 847, поэтому сетевых признаков мы честно не строим.</a:t>
             </a:r>
             <a:endParaRPr lang="en-US" dirty="0"/>
           </a:p>
@@ -1040,7 +1040,7 @@
           <a:p>
             <a:r>
               <a:rPr lang="en-US" dirty="0"/>
-              <a:t>[~35 с] Ядро — CatBoost по квантилям плюс GRU по треку телеметрии, 28 признаков на момент T. Верхняя строка таблицы — как на лидерборде: 52 секунды. Нижняя — честный «новый день» без клонов: 67 секунд против 88 у baseline организаторов, минус 24 процента. Квантили дают прогноз, вероятность опоздания и интервал — и мы их откалибровали: ошибка вероятности ECE упала с 0.11 до 0.03, а интервал держит 80 процентов на каждой минуте упреждения, раньше на 13–15 минутах было только 65.</a:t>
+              <a:t>[~35 с] Ядро — CatBoost по квантилям плюс GRU по треку телеметрии, 28 признаков на момент T. Верхняя строка таблицы — как на лидерборде: 52 секунды. Нижняя — честный «новый день» без клонов: 67 секунд против 88 у baseline организаторов, минус 24 процента. Квантили дают прогноз, вероятность опоздания и интервал — и мы их откалибровали: ошибка вероятности ECE упала с 0.11 до 0.03, а интервал держит 80 процентов на каждой минуте упреждения, раньше на 13–15 минутах было только 65. На платформе все ML-сабмиты дали скор 1.0 — в том числе обученный без копий моментов validate.</a:t>
             </a:r>
             <a:endParaRPr lang="en-US" dirty="0"/>
           </a:p>
@@ -1768,7 +1768,7 @@
       </p:grpSpPr>
       <p:pic>
         <p:nvPicPr>
-          <p:cNvPr id="2" name="Image 0" descr="/home/jinx/Desktop/transit-pulse/.claude/worktrees/agent-a1ec232645154e152/docs/pitch/img/overview.jpg">    </p:cNvPr>
+          <p:cNvPr id="2" name="Image 0" descr="/home/jinx/Desktop/transit-pulse/docs/pitch/img/overview.jpg">    </p:cNvPr>
           <p:cNvPicPr>
             <a:picLocks noChangeAspect="1"/>
           </p:cNvPicPr>
@@ -3061,7 +3061,7 @@
       </p:grpSpPr>
       <p:pic>
         <p:nvPicPr>
-          <p:cNvPr id="2" name="Image 0" descr="/home/jinx/Desktop/transit-pulse/.claude/worktrees/agent-a1ec232645154e152/docs/pitch/img/card_full.jpg">    </p:cNvPr>
+          <p:cNvPr id="2" name="Image 0" descr="/home/jinx/Desktop/transit-pulse/docs/pitch/img/card_full.jpg">    </p:cNvPr>
           <p:cNvPicPr>
             <a:picLocks noChangeAspect="1"/>
           </p:cNvPicPr>
@@ -5893,7 +5893,7 @@
                 <a:ea typeface="IBM Plex Sans" pitchFamily="34" charset="-122"/>
                 <a:cs typeface="IBM Plex Sans" pitchFamily="34" charset="-120"/>
               </a:rPr>
-              <a:t>Мы нашли утечку ответа —</a:t>
+              <a:t>Утечку ответа нашли —</a:t>
             </a:r>
             <a:endParaRPr lang="en-US" sz="3400" dirty="0"/>
           </a:p>
@@ -5910,7 +5910,7 @@
                 <a:ea typeface="IBM Plex Sans" pitchFamily="34" charset="-122"/>
                 <a:cs typeface="IBM Plex Sans" pitchFamily="34" charset="-120"/>
               </a:rPr>
-              <a:t>и не стали ей пользоваться</a:t>
+              <a:t>в признаки и обучение она не попадает</a:t>
             </a:r>
             <a:endParaRPr lang="en-US" sz="3400" dirty="0"/>
           </a:p>
@@ -6153,7 +6153,7 @@
                 <a:ea typeface="IBM Plex Sans" pitchFamily="34" charset="-122"/>
                 <a:cs typeface="IBM Plex Sans" pitchFamily="34" charset="-120"/>
               </a:rPr>
-              <a:t>Загрузчик расписания физически не читает колонку факта — это проверяет тест</a:t>
+              <a:t>Загрузчик не читает колонку факта — это проверяет тест. По факту лишь оценили шкалу метрики</a:t>
             </a:r>
             <a:endParaRPr lang="en-US" sz="1200" dirty="0"/>
           </a:p>
@@ -6273,7 +6273,7 @@
                 <a:ea typeface="IBM Plex Sans" pitchFamily="34" charset="-122"/>
                 <a:cs typeface="IBM Plex Sans" pitchFamily="34" charset="-120"/>
               </a:rPr>
-              <a:t>Сдвинутые копии, корреляция 0.88–0.99 → CV с защитой от клонов, иначе цифры завышены</a:t>
+              <a:t>Корреляция 0.88–0.99 → CV с защитой от клонов; сабмит v3 без копий моментов validate — тоже 1.0</a:t>
             </a:r>
             <a:endParaRPr lang="en-US" sz="1200" dirty="0"/>
           </a:p>
@@ -7742,7 +7742,7 @@
                 <a:ea typeface="IBM Plex Mono" pitchFamily="34" charset="-122"/>
                 <a:cs typeface="IBM Plex Mono" pitchFamily="34" charset="-120"/>
               </a:rPr>
-              <a:t>1 494 реальные точки · 3×5 GroupKFold по (ТС, 30-мин блок) · * ансамбль с LightGBM</a:t>
+              <a:t>1 494 точки · 3×5 GroupKFold (ТС, 30 мин) · * с LightGBM · платформа 1.0, и без клонов</a:t>
             </a:r>
             <a:endParaRPr lang="en-US" sz="1100" dirty="0"/>
           </a:p>
@@ -9882,7 +9882,7 @@
       </p:sp>
       <p:pic>
         <p:nvPicPr>
-          <p:cNvPr id="7" name="Image 0" descr="/home/jinx/Desktop/transit-pulse/.claude/worktrees/agent-a1ec232645154e152/docs/pitch/img/card_top.jpg">    </p:cNvPr>
+          <p:cNvPr id="7" name="Image 0" descr="/home/jinx/Desktop/transit-pulse/docs/pitch/img/card_top.jpg">    </p:cNvPr>
           <p:cNvPicPr>
             <a:picLocks noChangeAspect="1"/>
           </p:cNvPicPr>
@@ -9935,7 +9935,7 @@
       </p:sp>
       <p:pic>
         <p:nvPicPr>
-          <p:cNvPr id="9" name="Image 1" descr="/home/jinx/Desktop/transit-pulse/.claude/worktrees/agent-a1ec232645154e152/docs/pitch/img/whatif.jpg">    </p:cNvPr>
+          <p:cNvPr id="9" name="Image 1" descr="/home/jinx/Desktop/transit-pulse/docs/pitch/img/whatif.jpg">    </p:cNvPr>
           <p:cNvPicPr>
             <a:picLocks noChangeAspect="1"/>
           </p:cNvPicPr>
@@ -10504,7 +10504,7 @@
       </p:sp>
       <p:pic>
         <p:nvPicPr>
-          <p:cNvPr id="7" name="Image 0" descr="/home/jinx/Desktop/transit-pulse/.claude/worktrees/agent-a1ec232645154e152/docs/pitch/img/system.jpg">    </p:cNvPr>
+          <p:cNvPr id="7" name="Image 0" descr="/home/jinx/Desktop/transit-pulse/docs/pitch/img/system.jpg">    </p:cNvPr>
           <p:cNvPicPr>
             <a:picLocks noChangeAspect="1"/>
           </p:cNvPicPr>

--- a/docs/pitch/transit-pulse-pitch.pptx
+++ b/docs/pitch/transit-pulse-pitch.pptx
@@ -9860,11 +9860,11 @@
         <p:spPr>
           <a:xfrm>
             <a:off x="512064" y="1883664"/>
-            <a:ext cx="2503026" cy="4416552"/>
+            <a:ext cx="2496951" cy="4416552"/>
           </a:xfrm>
           <a:prstGeom prst="roundRect">
             <a:avLst>
-              <a:gd name="adj" fmla="val 2192"/>
+              <a:gd name="adj" fmla="val 2197"/>
             </a:avLst>
           </a:prstGeom>
           <a:solidFill>
@@ -9897,7 +9897,7 @@
         <p:spPr>
           <a:xfrm>
             <a:off x="548640" y="1920240"/>
-            <a:ext cx="2429874" cy="4343400"/>
+            <a:ext cx="2423799" cy="4343400"/>
           </a:xfrm>
           <a:prstGeom prst="rect">
             <a:avLst/>
@@ -9965,7 +9965,7 @@
         </p:nvSpPr>
         <p:spPr>
           <a:xfrm>
-            <a:off x="3389994" y="2066544"/>
+            <a:off x="3383919" y="2066544"/>
             <a:ext cx="182880" cy="182880"/>
           </a:xfrm>
           <a:prstGeom prst="triangle">
@@ -9985,8 +9985,8 @@
         </p:nvSpPr>
         <p:spPr>
           <a:xfrm>
-            <a:off x="3710034" y="2011680"/>
-            <a:ext cx="3681061" cy="320040"/>
+            <a:off x="3703959" y="2011680"/>
+            <a:ext cx="3687136" cy="320040"/>
           </a:xfrm>
           <a:prstGeom prst="rect">
             <a:avLst/>
@@ -10024,8 +10024,8 @@
         </p:nvSpPr>
         <p:spPr>
           <a:xfrm>
-            <a:off x="3710034" y="2377440"/>
-            <a:ext cx="3681061" cy="914400"/>
+            <a:off x="3703959" y="2377440"/>
+            <a:ext cx="3687136" cy="914400"/>
           </a:xfrm>
           <a:prstGeom prst="rect">
             <a:avLst/>
@@ -10063,7 +10063,7 @@
         </p:nvSpPr>
         <p:spPr>
           <a:xfrm>
-            <a:off x="3389994" y="3483864"/>
+            <a:off x="3383919" y="3483864"/>
             <a:ext cx="182880" cy="182880"/>
           </a:xfrm>
           <a:prstGeom prst="diamond">
@@ -10083,8 +10083,8 @@
         </p:nvSpPr>
         <p:spPr>
           <a:xfrm>
-            <a:off x="3710034" y="3429000"/>
-            <a:ext cx="3681061" cy="320040"/>
+            <a:off x="3703959" y="3429000"/>
+            <a:ext cx="3687136" cy="320040"/>
           </a:xfrm>
           <a:prstGeom prst="rect">
             <a:avLst/>
@@ -10122,8 +10122,8 @@
         </p:nvSpPr>
         <p:spPr>
           <a:xfrm>
-            <a:off x="3710034" y="3794760"/>
-            <a:ext cx="3681061" cy="914400"/>
+            <a:off x="3703959" y="3794760"/>
+            <a:ext cx="3687136" cy="914400"/>
           </a:xfrm>
           <a:prstGeom prst="rect">
             <a:avLst/>
@@ -10161,7 +10161,7 @@
         </p:nvSpPr>
         <p:spPr>
           <a:xfrm>
-            <a:off x="3389994" y="4901184"/>
+            <a:off x="3383919" y="4901184"/>
             <a:ext cx="182880" cy="182880"/>
           </a:xfrm>
           <a:prstGeom prst="ellipse">
@@ -10181,8 +10181,8 @@
         </p:nvSpPr>
         <p:spPr>
           <a:xfrm>
-            <a:off x="3710034" y="4846320"/>
-            <a:ext cx="3681061" cy="320040"/>
+            <a:off x="3703959" y="4846320"/>
+            <a:ext cx="3687136" cy="320040"/>
           </a:xfrm>
           <a:prstGeom prst="rect">
             <a:avLst/>
@@ -10220,8 +10220,8 @@
         </p:nvSpPr>
         <p:spPr>
           <a:xfrm>
-            <a:off x="3710034" y="5212080"/>
-            <a:ext cx="3681061" cy="914400"/>
+            <a:off x="3703959" y="5212080"/>
+            <a:ext cx="3687136" cy="914400"/>
           </a:xfrm>
           <a:prstGeom prst="rect">
             <a:avLst/>

--- a/docs/pitch/transit-pulse-pitch.pptx
+++ b/docs/pitch/transit-pulse-pitch.pptx
@@ -600,7 +600,7 @@
           <a:p>
             <a:r>
               <a:rPr lang="en-US" dirty="0"/>
-              <a:t>[~15 с] Дальше — данные за месяцы и дообучение без остановки сервиса, выдача GTFS-RT, светофорные фазы, сетевые признаки и пассажиропоток по дверным датчикам: ячейки IRMA и «Корона» NDTP уже поддерживаются. А теперь — живое демо.</a:t>
+              <a:t>[~15 с] Дальше — данные за месяцы: дообучение уже встроено, модель переобучается за 26 секунд и подменяется в работающем сервисе без остановки. Затем выдача GTFS-RT, светофорные фазы, сетевые признаки и пассажиропоток: ячейки дверей IRMA и «Корона» наш кодек уже разбирает, в датасете их пока нет. А теперь — живое демо.</a:t>
             </a:r>
             <a:endParaRPr lang="en-US" dirty="0"/>
           </a:p>
@@ -2534,7 +2534,7 @@
                 <a:ea typeface="IBM Plex Sans" pitchFamily="34" charset="-122"/>
                 <a:cs typeface="IBM Plex Sans" pitchFamily="34" charset="-120"/>
               </a:rPr>
-              <a:t>дообучение без остановки сервиса: ML stateless</a:t>
+              <a:t>дообучение уже встроено: train --refit 26 с, модель меняется на лету</a:t>
             </a:r>
             <a:endParaRPr lang="en-US" sz="1200" dirty="0"/>
           </a:p>
@@ -2946,7 +2946,7 @@
                 <a:ea typeface="IBM Plex Sans" pitchFamily="34" charset="-122"/>
                 <a:cs typeface="IBM Plex Sans" pitchFamily="34" charset="-120"/>
               </a:rPr>
-              <a:t>дверные датчики: ячейки IRMA и «Корона» NDTP уже поддержаны</a:t>
+              <a:t>двери IRMA и «Корона» кодек уже разбирает — ждём данных для признака</a:t>
             </a:r>
             <a:endParaRPr lang="en-US" sz="1200" dirty="0"/>
           </a:p>

--- a/docs/pitch/transit-pulse-pitch.pptx
+++ b/docs/pitch/transit-pulse-pitch.pptx
@@ -1040,7 +1040,7 @@
           <a:p>
             <a:r>
               <a:rPr lang="en-US" dirty="0"/>
-              <a:t>[~35 с] Ядро — CatBoost по квантилям плюс GRU по треку телеметрии, 28 признаков на момент T. Верхняя строка таблицы — как на лидерборде: 52 секунды. Нижняя — честный «новый день» без клонов: 67 секунд против 88 у baseline организаторов, минус 24 процента. Квантили дают прогноз, вероятность опоздания и интервал — и мы их откалибровали: ошибка вероятности ECE упала с 0.11 до 0.03, а интервал держит 80 процентов на каждой минуте упреждения, раньше на 13–15 минутах было только 65. На платформе все ML-сабмиты дали скор 1.0 — в том числе обученный без копий моментов validate.</a:t>
+              <a:t>[~35 с] Ядро — CatBoost по квантилям плюс GRU по треку телеметрии, 28 признаков на момент T. Верхняя строка таблицы — как на лидерборде: 52 секунды. Нижняя — честный «новый день» без клонов: 67 секунд против 88 у baseline организаторов, минус 24 процента. Квантили дают прогноз, вероятность опоздания и интервал — и мы их откалибровали: ошибка вероятности ECE упала с 0.11 до 0.03, а интервал держит 80 процентов на каждой минуте упреждения, раньше на 13–15 минутах было только 65. На платформе все ML-сабмиты дали скор 1.0 — в том числе обученный без копий моментов validate и тот, что выдала сама потоковая система, без подсказки организаторов.</a:t>
             </a:r>
             <a:endParaRPr lang="en-US" dirty="0"/>
           </a:p>
@@ -7742,7 +7742,7 @@
                 <a:ea typeface="IBM Plex Mono" pitchFamily="34" charset="-122"/>
                 <a:cs typeface="IBM Plex Mono" pitchFamily="34" charset="-120"/>
               </a:rPr>
-              <a:t>1 494 точки · 3×5 GroupKFold (ТС, 30 мин) · * с LightGBM · платформа 1.0, и без клонов</a:t>
+              <a:t>1 494 точки · 3×5 GroupKFold · * с LightGBM · платформа 1.0: без клонов и из потока</a:t>
             </a:r>
             <a:endParaRPr lang="en-US" sz="1100" dirty="0"/>
           </a:p>
